--- a/apresentacao/apresentacao_dissertacao_oficial.pptx
+++ b/apresentacao/apresentacao_dissertacao_oficial.pptx
@@ -143,11 +143,11 @@
         </c:ser>
         <c:gapWidth val="45"/>
         <c:overlap val="0"/>
-        <c:axId val="27396610"/>
-        <c:axId val="86760705"/>
+        <c:axId val="12666758"/>
+        <c:axId val="76109868"/>
       </c:barChart>
       <c:catAx>
-        <c:axId val="27396610"/>
+        <c:axId val="12666758"/>
         <c:scaling>
           <c:orientation val="maxMin"/>
         </c:scaling>
@@ -180,7 +180,7 @@
             </a:pPr>
           </a:p>
         </c:txPr>
-        <c:crossAx val="86760705"/>
+        <c:crossAx val="76109868"/>
         <c:crosses val="autoZero"/>
         <c:auto val="1"/>
         <c:lblAlgn val="ctr"/>
@@ -188,7 +188,7 @@
         <c:noMultiLvlLbl val="0"/>
       </c:catAx>
       <c:valAx>
-        <c:axId val="86760705"/>
+        <c:axId val="76109868"/>
         <c:scaling>
           <c:orientation val="minMax"/>
           <c:max val="5000000"/>
@@ -223,7 +223,7 @@
             </a:pPr>
           </a:p>
         </c:txPr>
-        <c:crossAx val="27396610"/>
+        <c:crossAx val="12666758"/>
         <c:crossBetween val="between"/>
       </c:valAx>
       <c:spPr>
@@ -490,11 +490,11 @@
         </c:ser>
         <c:gapWidth val="6"/>
         <c:overlap val="0"/>
-        <c:axId val="73115223"/>
-        <c:axId val="18444478"/>
+        <c:axId val="66926469"/>
+        <c:axId val="20208582"/>
       </c:barChart>
       <c:catAx>
-        <c:axId val="73115223"/>
+        <c:axId val="66926469"/>
         <c:scaling>
           <c:orientation val="minMax"/>
         </c:scaling>
@@ -527,7 +527,7 @@
             </a:pPr>
           </a:p>
         </c:txPr>
-        <c:crossAx val="18444478"/>
+        <c:crossAx val="20208582"/>
         <c:crosses val="autoZero"/>
         <c:auto val="1"/>
         <c:lblAlgn val="ctr"/>
@@ -535,7 +535,7 @@
         <c:noMultiLvlLbl val="0"/>
       </c:catAx>
       <c:valAx>
-        <c:axId val="18444478"/>
+        <c:axId val="20208582"/>
         <c:scaling>
           <c:orientation val="minMax"/>
           <c:max val="45"/>
@@ -580,7 +580,7 @@
             </a:pPr>
           </a:p>
         </c:txPr>
-        <c:crossAx val="73115223"/>
+        <c:crossAx val="66926469"/>
         <c:crosses val="autoZero"/>
         <c:crossBetween val="between"/>
         <c:majorUnit val="15"/>
@@ -835,11 +835,11 @@
         </c:ser>
         <c:gapWidth val="40"/>
         <c:overlap val="0"/>
-        <c:axId val="83986721"/>
-        <c:axId val="19130839"/>
+        <c:axId val="90781511"/>
+        <c:axId val="8061146"/>
       </c:barChart>
       <c:catAx>
-        <c:axId val="83986721"/>
+        <c:axId val="90781511"/>
         <c:scaling>
           <c:orientation val="maxMin"/>
         </c:scaling>
@@ -872,7 +872,7 @@
             </a:pPr>
           </a:p>
         </c:txPr>
-        <c:crossAx val="19130839"/>
+        <c:crossAx val="8061146"/>
         <c:crosses val="autoZero"/>
         <c:auto val="1"/>
         <c:lblAlgn val="ctr"/>
@@ -880,7 +880,7 @@
         <c:noMultiLvlLbl val="0"/>
       </c:catAx>
       <c:valAx>
-        <c:axId val="19130839"/>
+        <c:axId val="8061146"/>
         <c:scaling>
           <c:orientation val="minMax"/>
           <c:max val="38"/>
@@ -915,7 +915,7 @@
             </a:pPr>
           </a:p>
         </c:txPr>
-        <c:crossAx val="83986721"/>
+        <c:crossAx val="90781511"/>
         <c:crossBetween val="between"/>
       </c:valAx>
       <c:spPr>
@@ -1269,11 +1269,11 @@
         </c:ser>
         <c:gapWidth val="40"/>
         <c:overlap val="0"/>
-        <c:axId val="27333278"/>
-        <c:axId val="17543145"/>
+        <c:axId val="75377195"/>
+        <c:axId val="222389"/>
       </c:barChart>
       <c:catAx>
-        <c:axId val="27333278"/>
+        <c:axId val="75377195"/>
         <c:scaling>
           <c:orientation val="minMax"/>
         </c:scaling>
@@ -1306,7 +1306,7 @@
             </a:pPr>
           </a:p>
         </c:txPr>
-        <c:crossAx val="17543145"/>
+        <c:crossAx val="222389"/>
         <c:crosses val="autoZero"/>
         <c:auto val="1"/>
         <c:lblAlgn val="ctr"/>
@@ -1314,7 +1314,7 @@
         <c:noMultiLvlLbl val="0"/>
       </c:catAx>
       <c:valAx>
-        <c:axId val="17543145"/>
+        <c:axId val="222389"/>
         <c:scaling>
           <c:orientation val="minMax"/>
           <c:max val="0"/>
@@ -1349,7 +1349,7 @@
             </a:pPr>
           </a:p>
         </c:txPr>
-        <c:crossAx val="27333278"/>
+        <c:crossAx val="75377195"/>
         <c:crossBetween val="between"/>
       </c:valAx>
       <c:spPr>
@@ -2584,7 +2584,7 @@
             <a:pPr indent="0" algn="r">
               <a:buNone/>
             </a:pPr>
-            <a:fld id="{A310E97E-B704-4BBE-B30F-261000661A39}" type="slidenum">
+            <a:fld id="{1D686224-19A8-4FEB-A68B-2FF06BFA16FE}" type="slidenum">
               <a:rPr lang="pt-BR" sz="1400" b="0" u="none" strike="noStrike">
                 <a:solidFill>
                   <a:srgbClr val="000000"/>
@@ -2687,32 +2687,12 @@
               <a:buNone/>
             </a:pPr>
             <a:r>
-              <a:rPr lang="pt-BR" sz="2000" b="0" u="none" strike="noStrike">
-                <a:solidFill>
-                  <a:srgbClr val="000000"/>
-                </a:solidFill>
-                <a:effectLst/>
-                <a:uFillTx/>
-                <a:latin typeface="Arial"/>
-              </a:rPr>
-              <a:t>[Slide 1 de 12 · tempo previsto 0:30 · ao terminar, o relógio marca 0:30]</a:t>
-            </a:r>
-            <a:br>
-              <a:rPr sz="2000"/>
-            </a:br>
-            <a:br>
-              <a:rPr sz="2000"/>
-            </a:br>
-            <a:r>
-              <a:rPr lang="pt-BR" sz="2000" b="0" u="none" strike="noStrike">
-                <a:solidFill>
-                  <a:srgbClr val="000000"/>
-                </a:solidFill>
-                <a:effectLst/>
-                <a:uFillTx/>
-                <a:latin typeface="Arial"/>
-              </a:rPr>
-              <a:t>Oi, pessoal! Sou o Ricardo Carvalho da Costa. Agradeço a presença de todos, e um agradecimento especial ao professor Dr. Danny, meu orientador. Nos próximos minutos, vou contar uma história em três partes: o contexto, a tensão e a resolução. E tudo começa com uma pergunta simples: depois do ChatGPT, o trabalho no Brasil mudou mais para quem está nas ocupações mais expostas à inteligência artificial?</a:t>
+              <a:rPr b="1">
+                <a:solidFill>
+                  <a:srgbClr val="7F7F7F"/>
+                </a:solidFill>
+              </a:rPr>
+              <a:t>[Slide 1 de 12 · tempo previsto 0:45 · ao terminar, o relógio marca 0:45]</a:t>
             </a:r>
             <a:endParaRPr lang="pt-BR" sz="2000" b="0" u="none" strike="noStrike">
               <a:solidFill>
@@ -2722,6 +2702,18 @@
               <a:uFillTx/>
               <a:latin typeface="Arial"/>
             </a:endParaRPr>
+          </a:p>
+          <a:p/>
+          <a:p>
+            <a:r>
+              <a:t>Oi, pessoal! Sou o Ricardo Carvalho da Costa. Agradeço a presença de todos, em especial à banca, o Dr. Rodrigo Batista e o Dr. Abel Ferreira, e ao meu professor e orientador, o Dr. Danny.</a:t>
+            </a:r>
+          </a:p>
+          <a:p/>
+          <a:p>
+            <a:r>
+              <a:t>Nos próximos minutos, vou contar uma história em três partes: o contexto, a tensão e a resolução. E tudo começa com uma pergunta simples: depois do ChatGPT, o trabalho no Brasil mudou mais para quem está nas ocupações mais expostas à inteligência artificial?</a:t>
+            </a:r>
           </a:p>
         </p:txBody>
       </p:sp>
@@ -2776,7 +2768,7 @@
               </a:lnSpc>
               <a:buNone/>
             </a:pPr>
-            <a:fld id="{D7FEA341-E13E-4CB8-9E7F-ED5B461CAEFF}" type="slidenum">
+            <a:fld id="{C40BDFEF-3DD2-4D3B-A21E-E78A1747328E}" type="slidenum">
               <a:rPr lang="pt-BR" sz="1200" b="0" u="none" strike="noStrike">
                 <a:solidFill>
                   <a:schemeClr val="dk1"/>
@@ -2879,107 +2871,12 @@
               <a:buNone/>
             </a:pPr>
             <a:r>
-              <a:rPr lang="pt-BR" sz="2000" b="0" u="none" strike="noStrike">
-                <a:solidFill>
-                  <a:srgbClr val="000000"/>
-                </a:solidFill>
-                <a:effectLst/>
-                <a:uFillTx/>
-                <a:latin typeface="Arial"/>
-              </a:rPr>
-              <a:t>[Slide 10 de 12 · RESOLUÇÃO · tempo previsto 1:20 · ao terminar, o relógio marca 12:20]</a:t>
-            </a:r>
-            <a:br>
-              <a:rPr sz="2000"/>
-            </a:br>
-            <a:br>
-              <a:rPr sz="2000"/>
-            </a:br>
-            <a:r>
-              <a:rPr lang="pt-BR" sz="2000" b="0" u="none" strike="noStrike">
-                <a:solidFill>
-                  <a:srgbClr val="000000"/>
-                </a:solidFill>
-                <a:effectLst/>
-                <a:uFillTx/>
-                <a:latin typeface="Arial"/>
-              </a:rPr>
-              <a:t>E o emprego, como ficou? Aqui vem a surpresa. [Aponte para os dois primeiros números.] </a:t>
-            </a:r>
-            <a:r>
-              <a:rPr lang="pt-BR" sz="2000" b="1" u="none" strike="noStrike">
-                <a:solidFill>
-                  <a:srgbClr val="000000"/>
-                </a:solidFill>
-                <a:effectLst/>
-                <a:uFillTx/>
-                <a:latin typeface="Arial"/>
-              </a:rPr>
-              <a:t>Era de se esperar que os mais expostos perdessem o emprego ou caíssem na informalidade — mas não foi isso que apareceu.</a:t>
-            </a:r>
-            <a:r>
-              <a:rPr lang="pt-BR" sz="2000" b="0" i="1" u="none" strike="noStrike">
-                <a:solidFill>
-                  <a:schemeClr val="accent6"/>
-                </a:solidFill>
-                <a:effectLst/>
-                <a:uFillTx/>
-                <a:latin typeface="Arial"/>
-              </a:rPr>
-              <a:t> (analogia opcional: é como esperar que a barra de vida do personagem mais exposto caísse, e ela simplesmente não caiu — essa é a reviravolta do capítulo.)</a:t>
-            </a:r>
-            <a:r>
-              <a:rPr lang="pt-BR" sz="2000" b="0" u="none" strike="noStrike">
-                <a:solidFill>
-                  <a:srgbClr val="000000"/>
-                </a:solidFill>
-                <a:effectLst/>
-                <a:uFillTx/>
-                <a:latin typeface="Arial"/>
-              </a:rPr>
-              <a:t> Mais exposição veio junto com um pouco menos de saída do emprego, e menos passagem do formal para o informal.</a:t>
-            </a:r>
-            <a:br>
-              <a:rPr sz="2000"/>
-            </a:br>
-            <a:r>
-              <a:rPr lang="pt-BR" sz="2000" b="0" u="none" strike="noStrike">
-                <a:solidFill>
-                  <a:srgbClr val="000000"/>
-                </a:solidFill>
-                <a:effectLst/>
-                <a:uFillTx/>
-                <a:latin typeface="Arial"/>
-              </a:rPr>
-              <a:t>O terceiro número mostra que, na informalidade, quem está mais associado a isso é o teletrabalho, não a IA. Como os dois índices têm escalas diferentes, não dá para dizer qual força pesa mais.</a:t>
-            </a:r>
-            <a:br>
-              <a:rPr sz="2000"/>
-            </a:br>
-            <a:r>
-              <a:rPr lang="pt-BR" sz="2000" b="0" u="none" strike="noStrike">
-                <a:solidFill>
-                  <a:srgbClr val="000000"/>
-                </a:solidFill>
-                <a:effectLst/>
-                <a:uFillTx/>
-                <a:latin typeface="Arial"/>
-              </a:rPr>
-              <a:t>Uma explicação possível vem de Autor e Thompson: a tecnologia pode manter o emprego e mudar o salário. Mas eu não observo salários — então isso é uma hipótese, não um teste.</a:t>
-            </a:r>
-            <a:br>
-              <a:rPr sz="2000"/>
-            </a:br>
-            <a:r>
-              <a:rPr lang="pt-BR" sz="2000" b="0" u="none" strike="noStrike">
-                <a:solidFill>
-                  <a:srgbClr val="000000"/>
-                </a:solidFill>
-                <a:effectLst/>
-                <a:uFillTx/>
-                <a:latin typeface="Arial"/>
-              </a:rPr>
-              <a:t>Por fim, o controle: a chance de reencontrar a pessoa quase variou com a exposição, perto do limite de significância. Por isso não posso descartar que perdas de entrevista influenciem o resultado.</a:t>
+              <a:rPr b="1">
+                <a:solidFill>
+                  <a:srgbClr val="7F7F7F"/>
+                </a:solidFill>
+              </a:rPr>
+              <a:t>[Slide 10 de 12 · RESOLUÇÃO · tempo previsto 1:25 · ao terminar, o relógio marca 12:15]</a:t>
             </a:r>
             <a:endParaRPr lang="pt-BR" sz="2000" b="0" u="none" strike="noStrike">
               <a:solidFill>
@@ -2989,6 +2886,61 @@
               <a:uFillTx/>
               <a:latin typeface="Arial"/>
             </a:endParaRPr>
+          </a:p>
+          <a:p/>
+          <a:p>
+            <a:r>
+              <a:t>E o emprego, como ficou? Aqui vem a surpresa. </a:t>
+            </a:r>
+            <a:r>
+              <a:rPr i="1" b="1">
+                <a:solidFill>
+                  <a:srgbClr val="7F7F7F"/>
+                </a:solidFill>
+              </a:rPr>
+              <a:t>[Aponte para os dois primeiros números.]</a:t>
+            </a:r>
+            <a:r>
+              <a:t> Era de se esperar que os mais expostos perdessem o emprego ou caíssem na informalidade, mas não foi isso que apareceu. Mais exposição veio com um pouco menos de saída do emprego e menos passagem do formal para o informal.</a:t>
+            </a:r>
+          </a:p>
+          <a:p/>
+          <a:p>
+            <a:r>
+              <a:t>O terceiro número mostra que, na informalidade, quem aparece associado é o teletrabalho, não a IA. Como os índices têm escalas diferentes, não dá para dizer qual força pesa mais.</a:t>
+            </a:r>
+          </a:p>
+          <a:p/>
+          <a:p>
+            <a:r>
+              <a:t>Uma explicação possível vem de Autor e Thompson: a tecnologia pode manter o emprego e mudar o salário. Mas eu não observo salários, então é uma hipótese, não um teste.</a:t>
+            </a:r>
+          </a:p>
+          <a:p/>
+          <a:p>
+            <a:r>
+              <a:t>Por fim, o controle: a chance de reencontrar a pessoa quase variou com a exposição, perto do limite de significância. Não posso descartar que as perdas de entrevista influenciem o resultado.</a:t>
+            </a:r>
+          </a:p>
+          <a:p/>
+          <a:p/>
+          <a:p>
+            <a:r>
+              <a:rPr b="1">
+                <a:solidFill>
+                  <a:srgbClr val="C55A11"/>
+                </a:solidFill>
+              </a:rPr>
+              <a:t>ANALOGIA OPCIONAL: </a:t>
+            </a:r>
+            <a:r>
+              <a:rPr i="1">
+                <a:solidFill>
+                  <a:srgbClr val="C55A11"/>
+                </a:solidFill>
+              </a:rPr>
+              <a:t>É como esperar que a barra de vida do personagem mais exposto caísse, e ela simplesmente não caiu. É a reviravolta do capítulo.</a:t>
+            </a:r>
           </a:p>
         </p:txBody>
       </p:sp>
@@ -3043,7 +2995,7 @@
               </a:lnSpc>
               <a:buNone/>
             </a:pPr>
-            <a:fld id="{98EC3020-E1C0-4C23-B215-972117C57B48}" type="slidenum">
+            <a:fld id="{BCCE89BA-CDD0-485A-B899-5A5D77BF0519}" type="slidenum">
               <a:rPr lang="pt-BR" sz="1200" b="0" u="none" strike="noStrike">
                 <a:solidFill>
                   <a:schemeClr val="dk1"/>
@@ -3146,97 +3098,65 @@
               <a:buNone/>
             </a:pPr>
             <a:r>
-              <a:rPr lang="pt-BR" sz="2000" b="0" u="none" strike="noStrike">
-                <a:solidFill>
-                  <a:srgbClr val="000000"/>
-                </a:solidFill>
-                <a:effectLst/>
-                <a:uFillTx/>
-                <a:latin typeface="Arial"/>
-              </a:rPr>
-              <a:t>[Slide 11 de 12 · RESOLUÇÃO · tempo previsto 1:20 · ao terminar, o relógio marca 13:40]</a:t>
-            </a:r>
-            <a:br>
-              <a:rPr sz="2000"/>
-            </a:br>
-            <a:br>
-              <a:rPr sz="2000"/>
-            </a:br>
-            <a:r>
-              <a:rPr lang="pt-BR" sz="2000" b="0" u="none" strike="noStrike">
-                <a:solidFill>
-                  <a:srgbClr val="000000"/>
-                </a:solidFill>
-                <a:effectLst/>
-                <a:uFillTx/>
-                <a:latin typeface="Arial"/>
-              </a:rPr>
+              <a:rPr b="1">
+                <a:solidFill>
+                  <a:srgbClr val="7F7F7F"/>
+                </a:solidFill>
+              </a:rPr>
+              <a:t>[Slide 11 de 12 · RESOLUÇÃO · tempo previsto 1:20 · ao terminar, o relógio marca 13:35]</a:t>
+            </a:r>
+            <a:endParaRPr lang="pt-BR" sz="2000" b="0" u="none" strike="noStrike">
+              <a:solidFill>
+                <a:srgbClr val="000000"/>
+              </a:solidFill>
+              <a:effectLst/>
+              <a:uFillTx/>
+              <a:latin typeface="Arial"/>
+            </a:endParaRPr>
+          </a:p>
+          <a:p/>
+          <a:p>
+            <a:r>
               <a:t>Então, o que esses resultados permitem dizer, e o que não permitem?</a:t>
             </a:r>
-            <a:br>
-              <a:rPr sz="2000"/>
-            </a:br>
-            <a:r>
-              <a:rPr lang="pt-BR" sz="2000" b="1" u="none" strike="noStrike">
-                <a:solidFill>
-                  <a:srgbClr val="000000"/>
-                </a:solidFill>
-                <a:effectLst/>
-                <a:uFillTx/>
-                <a:latin typeface="Arial"/>
-              </a:rPr>
-              <a:t>Eles permitem dizer três coisas: a mobilidade subiu para todos; existe um gradiente — quanto mais exposta a ocupação, mais as pessoas foram para ocupações menos expostas, cerca de 2 pontos por unidade de exposição; e o vínculo dos mais expostos não piorou.</a:t>
-            </a:r>
-            <a:br>
-              <a:rPr sz="2000"/>
-            </a:br>
-            <a:r>
-              <a:rPr lang="pt-BR" sz="2000" b="0" u="none" strike="noStrike">
-                <a:solidFill>
-                  <a:srgbClr val="000000"/>
-                </a:solidFill>
-                <a:effectLst/>
-                <a:uFillTx/>
-                <a:latin typeface="Arial"/>
-              </a:rPr>
-              <a:t>Eles não permitem dizer que a IA causou isso. Ainda falta o estudo de evento, que testa se as ocupações já se comportavam diferente antes do marco. Eu não observo quem usa IA, só quem está exposto. E o marco é um só, para o país inteiro.</a:t>
-            </a:r>
-            <a:br>
-              <a:rPr sz="2000"/>
-            </a:br>
-            <a:r>
-              <a:rPr lang="pt-BR" sz="2000" b="0" u="none" strike="noStrike">
-                <a:solidFill>
-                  <a:srgbClr val="000000"/>
-                </a:solidFill>
-                <a:effectLst/>
-                <a:uFillTx/>
-                <a:latin typeface="Arial"/>
-              </a:rPr>
-              <a:t>E há o limite mais sério: no começo de 2020, justamente quando a entrevista passou a ser por telefone, a taxa medida de mudança de ocupação caiu pela metade, de 30% para 15%, e só voltou no fim de 2021. A causa dessa quebra ainda não está demonstrada.</a:t>
-            </a:r>
-            <a:br>
-              <a:rPr sz="2000"/>
-            </a:br>
-            <a:r>
-              <a:rPr lang="pt-BR" sz="2000" b="0" i="1" u="none" strike="noStrike">
-                <a:solidFill>
-                  <a:schemeClr val="accent6"/>
-                </a:solidFill>
-                <a:effectLst/>
-                <a:uFillTx/>
-                <a:latin typeface="Arial"/>
-              </a:rPr>
-              <a:t>Analogia opcional (avalie se quer usar): foi como um save corrompido no meio do jogo — mudou a forma de medir, e isso pode ter bagunçado o placar por um tempo.</a:t>
-            </a:r>
-            <a:endParaRPr lang="pt-BR" sz="2000" b="0" u="none" strike="noStrike">
-              <a:solidFill>
-                <a:srgbClr val="000000"/>
-              </a:solidFill>
-              <a:effectLst/>
-              <a:uFillTx/>
-              <a:latin typeface="Arial"/>
-            </a:endParaRPr>
+          </a:p>
+          <a:p/>
+          <a:p>
+            <a:r>
+              <a:t>Permitem três coisas: a mobilidade subiu para todos; existe um gradiente, de cerca de 2 pontos por unidade de exposição, em direção a ocupações menos expostas; e o vínculo dos mais expostos não piorou.</a:t>
+            </a:r>
+          </a:p>
+          <a:p/>
+          <a:p>
+            <a:r>
+              <a:t>Não permitem dizer que a IA causou isso. Falta o estudo de evento, que testa se as ocupações já se comportavam diferente antes do marco. Eu não observo quem usa IA, só quem está exposto. E o marco é um só, para o país inteiro.</a:t>
+            </a:r>
+          </a:p>
+          <a:p/>
+          <a:p>
+            <a:r>
+              <a:t>E há o limite mais sério: no começo de 2020, quando a entrevista passou a ser por telefone, a taxa medida de mudança de ocupação caiu pela metade, de 30% para 15%, e só voltou no fim de 2021. A causa dessa quebra ainda não está demonstrada.</a:t>
+            </a:r>
+          </a:p>
+          <a:p/>
+          <a:p/>
+          <a:p>
+            <a:r>
+              <a:rPr b="1">
+                <a:solidFill>
+                  <a:srgbClr val="C55A11"/>
+                </a:solidFill>
+              </a:rPr>
+              <a:t>ANALOGIA OPCIONAL: </a:t>
+            </a:r>
+            <a:r>
+              <a:rPr i="1">
+                <a:solidFill>
+                  <a:srgbClr val="C55A11"/>
+                </a:solidFill>
+              </a:rPr>
+              <a:t>Foi como um save corrompido no meio do jogo: mudou a forma de medir, e isso pode ter bagunçado o placar por um tempo.</a:t>
+            </a:r>
           </a:p>
         </p:txBody>
       </p:sp>
@@ -3291,7 +3211,7 @@
               </a:lnSpc>
               <a:buNone/>
             </a:pPr>
-            <a:fld id="{73EB1C28-B1E3-479B-BB4D-3A7D8DDE0521}" type="slidenum">
+            <a:fld id="{CD28BD91-40EA-4831-9FD7-1E95938DEE9B}" type="slidenum">
               <a:rPr lang="pt-BR" sz="1200" b="0" u="none" strike="noStrike">
                 <a:solidFill>
                   <a:schemeClr val="dk1"/>
@@ -3394,125 +3314,57 @@
               <a:buNone/>
             </a:pPr>
             <a:r>
-              <a:rPr lang="pt-BR" sz="2000" b="0" u="none" strike="noStrike">
-                <a:solidFill>
-                  <a:srgbClr val="000000"/>
-                </a:solidFill>
-                <a:effectLst/>
-                <a:uFillTx/>
-                <a:latin typeface="Arial"/>
-              </a:rPr>
-              <a:t>[Slide 12 de 12 · RESOLUÇÃO · tempo previsto 1:20 · ao terminar, o relógio marca 15:00]</a:t>
-            </a:r>
-            <a:br>
-              <a:rPr sz="2000"/>
-            </a:br>
-            <a:br>
-              <a:rPr sz="2000"/>
-            </a:br>
-            <a:r>
-              <a:rPr lang="pt-BR" sz="2000" b="0" u="none" strike="noStrike">
-                <a:solidFill>
-                  <a:srgbClr val="000000"/>
-                </a:solidFill>
-                <a:effectLst/>
-                <a:uFillTx/>
-                <a:latin typeface="Arial"/>
-              </a:rPr>
+              <a:rPr b="1">
+                <a:solidFill>
+                  <a:srgbClr val="7F7F7F"/>
+                </a:solidFill>
+              </a:rPr>
+              <a:t>[Slide 12 de 12 · RESOLUÇÃO · tempo previsto 1:25 · ao terminar, o relógio marca 15:00]</a:t>
+            </a:r>
+            <a:endParaRPr lang="pt-BR" sz="2000" b="0" u="none" strike="noStrike">
+              <a:solidFill>
+                <a:srgbClr val="000000"/>
+              </a:solidFill>
+              <a:effectLst/>
+              <a:uFillTx/>
+              <a:latin typeface="Arial"/>
+            </a:endParaRPr>
+          </a:p>
+          <a:p/>
+          <a:p>
+            <a:r>
               <a:t>Para fechar, a resposta em três níveis.</a:t>
             </a:r>
-            <a:br>
-              <a:rPr sz="2000"/>
-            </a:br>
-            <a:r>
-              <a:rPr lang="pt-BR" sz="2000" b="0" u="none" strike="noStrike">
-                <a:solidFill>
-                  <a:srgbClr val="000000"/>
-                </a:solidFill>
-                <a:effectLst/>
-                <a:uFillTx/>
-                <a:latin typeface="Arial"/>
-              </a:rPr>
+          </a:p>
+          <a:p/>
+          <a:p>
+            <a:r>
               <a:t>Primeiro, o que os dados mostram: depois do ChatGPT, a mobilidade subiu para todos, não só para os mais expostos.</a:t>
             </a:r>
-            <a:br>
-              <a:rPr sz="2000"/>
-            </a:br>
-            <a:r>
-              <a:rPr lang="pt-BR" sz="2000" b="0" u="none" strike="noStrike">
-                <a:solidFill>
-                  <a:srgbClr val="000000"/>
-                </a:solidFill>
-                <a:effectLst/>
-                <a:uFillTx/>
-                <a:latin typeface="Arial"/>
-              </a:rPr>
-              <a:t>Segundo, a associação: existe um gradiente de cerca de 2 pontos por unidade de exposição, na direção de ocupações menos expostas — e o vínculo não piorou.</a:t>
-            </a:r>
-            <a:br>
-              <a:rPr sz="2000"/>
-            </a:br>
-            <a:r>
-              <a:rPr lang="pt-BR" sz="2000" b="1" u="none" strike="noStrike">
-                <a:solidFill>
-                  <a:srgbClr val="000000"/>
-                </a:solidFill>
-                <a:effectLst/>
-                <a:uFillTx/>
-                <a:latin typeface="Arial"/>
-              </a:rPr>
-              <a:t>Terceiro, a causalidade: o desenho atual ainda não permite afirmar isso.</a:t>
-            </a:r>
-            <a:br>
-              <a:rPr sz="2000"/>
-            </a:br>
-            <a:r>
-              <a:rPr lang="pt-BR" sz="2000" b="0" u="none" strike="noStrike">
-                <a:solidFill>
-                  <a:srgbClr val="000000"/>
-                </a:solidFill>
-                <a:effectLst/>
-                <a:uFillTx/>
-                <a:latin typeface="Arial"/>
-              </a:rPr>
-              <a:t>O que eu entrego hoje é uma descrição cuidadosa e um caminho claro até a resposta causal, se ela existir. Esse caminho tem cinco passos: tratar a quebra de 2020-2021; fazer o estudo de evento; rodar testes de sensibilidade; usar uma medida feita para modelos de linguagem e um placebo com o teletrabalho; e aplicar métodos próprios para tratamento contínuo. Salários e outras extensões vêm depois.</a:t>
-            </a:r>
-            <a:br>
-              <a:rPr sz="2000"/>
-            </a:br>
-            <a:r>
-              <a:rPr lang="pt-BR" sz="2000" b="0" u="none" strike="noStrike">
-                <a:solidFill>
-                  <a:srgbClr val="000000"/>
-                </a:solidFill>
-                <a:effectLst/>
-                <a:uFillTx/>
-                <a:latin typeface="Arial"/>
-              </a:rPr>
+          </a:p>
+          <a:p/>
+          <a:p>
+            <a:r>
+              <a:t>Segundo, a associação: existe um gradiente de cerca de 2 pontos por unidade de exposição, em direção a ocupações menos expostas, e o vínculo não piorou.</a:t>
+            </a:r>
+          </a:p>
+          <a:p/>
+          <a:p>
+            <a:r>
+              <a:t>Terceiro, a causalidade: o desenho atual ainda não permite afirmá-la.</a:t>
+            </a:r>
+          </a:p>
+          <a:p/>
+          <a:p>
+            <a:r>
+              <a:t>O que entrego hoje é uma descrição cuidadosa e um caminho claro até a resposta causal, se ela existir. São cinco passos: tratar a quebra de 2020 e 2021; fazer o estudo de evento; rodar testes de sensibilidade; usar uma medida feita para modelos de linguagem, com um placebo de teletrabalho; e aplicar métodos próprios para tratamento contínuo. Salários e outras extensões vêm depois.</a:t>
+            </a:r>
+          </a:p>
+          <a:p/>
+          <a:p>
+            <a:r>
               <a:t>Muito obrigado. Fico à disposição para as perguntas.</a:t>
             </a:r>
-            <a:br>
-              <a:rPr sz="2000"/>
-            </a:br>
-            <a:r>
-              <a:rPr lang="pt-BR" sz="2000" b="0" i="1" u="none" strike="noStrike">
-                <a:solidFill>
-                  <a:schemeClr val="accent6"/>
-                </a:solidFill>
-                <a:effectLst/>
-                <a:uFillTx/>
-                <a:latin typeface="Arial"/>
-              </a:rPr>
-              <a:t>Analogia opcional (avalie se quer usar): são como os próximos cinco níveis de um jogo até chegar na fase final — a resposta causal.</a:t>
-            </a:r>
-            <a:endParaRPr lang="pt-BR" sz="2000" b="0" u="none" strike="noStrike">
-              <a:solidFill>
-                <a:srgbClr val="000000"/>
-              </a:solidFill>
-              <a:effectLst/>
-              <a:uFillTx/>
-              <a:latin typeface="Arial"/>
-            </a:endParaRPr>
           </a:p>
         </p:txBody>
       </p:sp>
@@ -3567,7 +3419,7 @@
               </a:lnSpc>
               <a:buNone/>
             </a:pPr>
-            <a:fld id="{F3604D3E-E95D-41E9-B07C-A140D85373A2}" type="slidenum">
+            <a:fld id="{36581907-969F-40AF-9677-85889B6E20FA}" type="slidenum">
               <a:rPr lang="pt-BR" sz="1200" b="0" u="none" strike="noStrike">
                 <a:solidFill>
                   <a:schemeClr val="dk1"/>
@@ -3670,110 +3522,12 @@
               <a:buNone/>
             </a:pPr>
             <a:r>
-              <a:rPr lang="pt-BR" sz="2000" b="0" u="none" strike="noStrike">
-                <a:solidFill>
-                  <a:srgbClr val="000000"/>
-                </a:solidFill>
-                <a:effectLst/>
-                <a:uFillTx/>
-                <a:latin typeface="Arial"/>
-              </a:rPr>
-              <a:t>[Slide 2 de 12 · CONTEXTO · tempo previsto 1:40 · ao terminar, o relógio marca 2:10]</a:t>
-            </a:r>
-            <a:br>
-              <a:rPr sz="2000"/>
-            </a:br>
-            <a:br>
-              <a:rPr sz="2000"/>
-            </a:br>
-            <a:r>
-              <a:rPr lang="pt-BR" sz="2000" b="0" u="none" strike="noStrike">
-                <a:solidFill>
-                  <a:srgbClr val="000000"/>
-                </a:solidFill>
-                <a:effectLst/>
-                <a:uFillTx/>
-                <a:latin typeface="Arial"/>
-              </a:rPr>
-              <a:t>Vou começar pelo contexto. No dia 30 de novembro de 2022, o ChatGPT ficou disponível para qualquer pessoa. De um dia para o outro, todo mundo passou a ter acesso a uma ferramenta que escreve, resume e até programa.</a:t>
-            </a:r>
-            <a:br>
-              <a:rPr sz="2000"/>
-            </a:br>
-            <a:r>
-              <a:rPr lang="pt-BR" sz="2000" b="0" u="none" strike="noStrike">
-                <a:solidFill>
-                  <a:srgbClr val="000000"/>
-                </a:solidFill>
-                <a:effectLst/>
-                <a:uFillTx/>
-                <a:latin typeface="Arial"/>
-              </a:rPr>
-              <a:t>Para quem estuda o mercado de trabalho, essa data é um presente: ela é certa, vale para o Brasil inteiro, e ninguém escolheu participar ou não.</a:t>
-            </a:r>
-            <a:br>
-              <a:rPr sz="2000"/>
-            </a:br>
-            <a:r>
-              <a:rPr lang="pt-BR" sz="2000" b="1" u="none" strike="noStrike">
-                <a:solidFill>
-                  <a:srgbClr val="000000"/>
-                </a:solidFill>
-                <a:effectLst/>
-                <a:uFillTx/>
-                <a:latin typeface="Arial"/>
-              </a:rPr>
-              <a:t>A pergunta da minha dissertação é esta: quem trabalha em ocupações mais expostas à IA passou a mudar de emprego de um jeito diferente depois dessa data?</a:t>
-            </a:r>
-            <a:br>
-              <a:rPr sz="2000"/>
-            </a:br>
-            <a:r>
-              <a:rPr lang="pt-BR" sz="2000" b="0" u="none" strike="noStrike">
-                <a:solidFill>
-                  <a:srgbClr val="000000"/>
-                </a:solidFill>
-                <a:effectLst/>
-                <a:uFillTx/>
-                <a:latin typeface="Arial"/>
-              </a:rPr>
-              <a:t>Isso importa porque mudar de emprego mexe com a renda das pessoas, com a informalidade, e com o tipo de qualificação que o país vai precisar. E quase tudo o que já sabemos sobre isso vem de países ricos, não do Brasil.</a:t>
-            </a:r>
-            <a:br>
-              <a:rPr sz="2000"/>
-            </a:br>
-            <a:r>
-              <a:rPr lang="pt-BR" sz="2000" b="0" u="none" strike="noStrike">
-                <a:solidFill>
-                  <a:srgbClr val="000000"/>
-                </a:solidFill>
-                <a:effectLst/>
-                <a:uFillTx/>
-                <a:latin typeface="Arial"/>
-              </a:rPr>
-              <a:t>Duas palavras-chave aqui. Exposição é uma característica da ocupação, não da pessoa — ela mede o quanto as tarefas daquele trabalho se parecem com o que a IA faz.</a:t>
-            </a:r>
-            <a:r>
-              <a:rPr lang="pt-BR" sz="2000" b="0" i="1" u="none" strike="noStrike">
-                <a:solidFill>
-                  <a:schemeClr val="accent6"/>
-                </a:solidFill>
-                <a:effectLst/>
-                <a:uFillTx/>
-                <a:latin typeface="Arial"/>
-              </a:rPr>
-              <a:t> (analogia opcional: é como quando a Capcom lança um patch de balanceamento em Street Fighter — a atualização vale pro jogo inteiro ao mesmo tempo, mas Ryu e Zangief sentem o ajuste de formas diferentes. A exposição é o personagem que você escolhe: alguns sentem mais o patch do que outros, não importa quem está jogando.)</a:t>
-            </a:r>
-            <a:r>
-              <a:rPr lang="pt-BR" sz="2000" b="0" u="none" strike="noStrike">
-                <a:solidFill>
-                  <a:srgbClr val="000000"/>
-                </a:solidFill>
-                <a:effectLst/>
-                <a:uFillTx/>
-                <a:latin typeface="Arial"/>
-              </a:rPr>
-              <a:t> E transição é o que acontece com a mesma pessoa de um trimestre para o outro.</a:t>
+              <a:rPr b="1">
+                <a:solidFill>
+                  <a:srgbClr val="7F7F7F"/>
+                </a:solidFill>
+              </a:rPr>
+              <a:t>[Slide 2 de 12 · CONTEXTO · tempo previsto 1:35 · ao terminar, o relógio marca 2:20]</a:t>
             </a:r>
             <a:endParaRPr lang="pt-BR" sz="2000" b="0" u="none" strike="noStrike">
               <a:solidFill>
@@ -3783,6 +3537,56 @@
               <a:uFillTx/>
               <a:latin typeface="Arial"/>
             </a:endParaRPr>
+          </a:p>
+          <a:p/>
+          <a:p>
+            <a:r>
+              <a:t>Vou começar pelo contexto. Em 30 de novembro de 2022, o ChatGPT ficou disponível para qualquer pessoa. De um dia para o outro, todo mundo passou a ter uma ferramenta que escreve, resume e até programa.</a:t>
+            </a:r>
+          </a:p>
+          <a:p/>
+          <a:p>
+            <a:r>
+              <a:t>Para quem estuda o mercado de trabalho, essa data é um presente: é certa, vale para o Brasil inteiro e ninguém escolheu participar.</a:t>
+            </a:r>
+          </a:p>
+          <a:p/>
+          <a:p>
+            <a:r>
+              <a:t>A pergunta da minha dissertação é esta: quem trabalha em ocupações mais expostas à IA passou a mudar de trabalho de um jeito diferente depois dessa data?</a:t>
+            </a:r>
+          </a:p>
+          <a:p/>
+          <a:p>
+            <a:r>
+              <a:t>Isso importa porque mudar de trabalho mexe com a renda, com a informalidade e com a qualificação que o país vai precisar. E quase tudo o que sabemos vem de países ricos.</a:t>
+            </a:r>
+          </a:p>
+          <a:p/>
+          <a:p>
+            <a:r>
+              <a:t>Duas palavras-chave. Exposição é uma característica da ocupação, não da pessoa: mede o quanto as tarefas daquele trabalho se parecem com o que a IA faz. E transição é o que acontece com a mesma pessoa de um trimestre para o outro.</a:t>
+            </a:r>
+          </a:p>
+          <a:p/>
+          <a:p/>
+          <a:p>
+            <a:r>
+              <a:rPr b="1">
+                <a:solidFill>
+                  <a:srgbClr val="C55A11"/>
+                </a:solidFill>
+              </a:rPr>
+              <a:t>ANALOGIA OPCIONAL: </a:t>
+            </a:r>
+            <a:r>
+              <a:rPr i="1">
+                <a:solidFill>
+                  <a:srgbClr val="C55A11"/>
+                </a:solidFill>
+              </a:rPr>
+              <a:t>É como um patch de balanceamento em Street Fighter: a atualização chega para o jogo inteiro no mesmo dia, mas Ryu e Zangief sentem o ajuste de formas diferentes. A exposição é o personagem: alguns sentem mais o patch do que outros.</a:t>
+            </a:r>
           </a:p>
         </p:txBody>
       </p:sp>
@@ -3837,7 +3641,7 @@
               </a:lnSpc>
               <a:buNone/>
             </a:pPr>
-            <a:fld id="{E68F226B-6239-42F2-87F8-E10BA6A7261C}" type="slidenum">
+            <a:fld id="{F1446D58-3B0C-4985-9C64-1FDB237D9F38}" type="slidenum">
               <a:rPr lang="pt-BR" sz="1200" b="0" u="none" strike="noStrike">
                 <a:solidFill>
                   <a:schemeClr val="dk1"/>
@@ -3940,113 +3744,12 @@
               <a:buNone/>
             </a:pPr>
             <a:r>
-              <a:rPr lang="pt-BR" sz="2000" b="0" u="none" strike="noStrike">
-                <a:solidFill>
-                  <a:srgbClr val="000000"/>
-                </a:solidFill>
-                <a:effectLst/>
-                <a:uFillTx/>
-                <a:latin typeface="Arial"/>
-              </a:rPr>
-              <a:t>[Slide 3 de 12 · CONTEXTO · tempo previsto 1:15 · ao terminar, o relógio marca 3:25]</a:t>
-            </a:r>
-            <a:br>
-              <a:rPr sz="2000"/>
-            </a:br>
-            <a:br>
-              <a:rPr sz="2000"/>
-            </a:br>
-            <a:r>
-              <a:rPr lang="pt-BR" sz="2000" b="0" u="none" strike="noStrike">
-                <a:solidFill>
-                  <a:srgbClr val="000000"/>
-                </a:solidFill>
-                <a:effectLst/>
-                <a:uFillTx/>
-                <a:latin typeface="Arial"/>
-              </a:rPr>
-              <a:t>O que já se sabe sobre o tema? A pesquisa caminha em três frentes.</a:t>
-            </a:r>
-            <a:br>
-              <a:rPr sz="2000"/>
-            </a:br>
-            <a:r>
-              <a:rPr lang="pt-BR" sz="2000" b="0" u="none" strike="noStrike">
-                <a:solidFill>
-                  <a:srgbClr val="000000"/>
-                </a:solidFill>
-                <a:effectLst/>
-                <a:uFillTx/>
-                <a:latin typeface="Arial"/>
-              </a:rPr>
-              <a:t>A primeira mede a exposição: Felten, Raj e Seamans criaram o índice que eu uso, o AIOE. Ele liga as tarefas de cada ocupação ao que a IA consegue fazer.</a:t>
-            </a:r>
-            <a:br>
-              <a:rPr sz="2000"/>
-            </a:br>
-            <a:r>
-              <a:rPr lang="pt-BR" sz="2000" b="0" u="none" strike="noStrike">
-                <a:solidFill>
-                  <a:srgbClr val="000000"/>
-                </a:solidFill>
-                <a:effectLst/>
-                <a:uFillTx/>
-                <a:latin typeface="Arial"/>
-              </a:rPr>
-              <a:t>A segunda observa quem já usa IA no trabalho. Numa central de atendimento, a produtividade subiu. Na Dinamarca, dois anos depois, salários e horas quase não mudaram.</a:t>
-            </a:r>
-            <a:br>
-              <a:rPr sz="2000"/>
-            </a:br>
-            <a:r>
-              <a:rPr lang="pt-BR" sz="2000" b="0" u="none" strike="noStrike">
-                <a:solidFill>
-                  <a:srgbClr val="000000"/>
-                </a:solidFill>
-                <a:effectLst/>
-                <a:uFillTx/>
-                <a:latin typeface="Arial"/>
-              </a:rPr>
-              <a:t>A terceira me dá o método e o contexto brasileiro, onde as pessoas entram e saem da informalidade o tempo todo.</a:t>
-            </a:r>
-            <a:br>
-              <a:rPr sz="2000"/>
-            </a:br>
-            <a:r>
-              <a:rPr lang="pt-BR" sz="2000" b="1" u="none" strike="noStrike">
-                <a:solidFill>
-                  <a:srgbClr val="000000"/>
-                </a:solidFill>
-                <a:effectLst/>
-                <a:uFillTx/>
-                <a:latin typeface="Arial"/>
-              </a:rPr>
-              <a:t>E aqui está a lacuna: no Brasil, nenhuma pesquisa grande pergunta diretamente quem usa IA no trabalho.</a:t>
-            </a:r>
-            <a:r>
-              <a:rPr lang="pt-BR" sz="2000" b="0" u="none" strike="noStrike">
-                <a:solidFill>
-                  <a:srgbClr val="000000"/>
-                </a:solidFill>
-                <a:effectLst/>
-                <a:uFillTx/>
-                <a:latin typeface="Arial"/>
-              </a:rPr>
-              <a:t> Por isso eu uso o que existe — a exposição da ocupação — numa pesquisa feita porta a porta, nos domicílios.</a:t>
-            </a:r>
-            <a:br>
-              <a:rPr sz="2000"/>
-            </a:br>
-            <a:r>
-              <a:rPr lang="pt-BR" sz="2000" b="0" i="1" u="none" strike="noStrike">
-                <a:solidFill>
-                  <a:schemeClr val="accent6"/>
-                </a:solidFill>
-                <a:effectLst/>
-                <a:uFillTx/>
-                <a:latin typeface="Arial"/>
-              </a:rPr>
-              <a:t>Analogia opcional (avalie se quer usar): é como ter ótimos relatórios de scout sobre vários campeonatos, mas nenhum scout específico do Brasileirão. Então eu uso os dados que o próprio campeonato brasileiro já tem.</a:t>
+              <a:rPr b="1">
+                <a:solidFill>
+                  <a:srgbClr val="7F7F7F"/>
+                </a:solidFill>
+              </a:rPr>
+              <a:t>[Slide 3 de 12 · CONTEXTO · tempo previsto 1:10 · ao terminar, o relógio marca 3:30]</a:t>
             </a:r>
             <a:endParaRPr lang="pt-BR" sz="2000" b="0" u="none" strike="noStrike">
               <a:solidFill>
@@ -4056,6 +3759,56 @@
               <a:uFillTx/>
               <a:latin typeface="Arial"/>
             </a:endParaRPr>
+          </a:p>
+          <a:p/>
+          <a:p>
+            <a:r>
+              <a:t>O que já se sabe sobre o tema? A pesquisa anda em três frentes.</a:t>
+            </a:r>
+          </a:p>
+          <a:p/>
+          <a:p>
+            <a:r>
+              <a:t>A primeira mede a exposição. Felten, Raj e Seamans criaram o índice que eu uso, o AIOE, que liga as habilidades de cada ocupação ao que a IA consegue fazer.</a:t>
+            </a:r>
+          </a:p>
+          <a:p/>
+          <a:p>
+            <a:r>
+              <a:t>A segunda observa quem já usa IA. Numa central de atendimento, a produtividade subiu. Na Dinamarca, dois anos depois, salários e horas quase não mudaram.</a:t>
+            </a:r>
+          </a:p>
+          <a:p/>
+          <a:p>
+            <a:r>
+              <a:t>A terceira me dá o método e o contexto brasileiro, em que as pessoas entram e saem da informalidade o tempo todo.</a:t>
+            </a:r>
+          </a:p>
+          <a:p/>
+          <a:p>
+            <a:r>
+              <a:t>E aqui está a lacuna: no Brasil, nenhuma pesquisa grande pergunta quem usa IA no trabalho. Por isso uso o que existe: a exposição da ocupação, numa pesquisa feita nos domicílios.</a:t>
+            </a:r>
+          </a:p>
+          <a:p/>
+          <a:p/>
+          <a:p>
+            <a:r>
+              <a:rPr b="1">
+                <a:solidFill>
+                  <a:srgbClr val="C55A11"/>
+                </a:solidFill>
+              </a:rPr>
+              <a:t>ANALOGIA OPCIONAL: </a:t>
+            </a:r>
+            <a:r>
+              <a:rPr i="1">
+                <a:solidFill>
+                  <a:srgbClr val="C55A11"/>
+                </a:solidFill>
+              </a:rPr>
+              <a:t>É como ter ótimos relatórios de scout de vários campeonatos, mas nenhum do Brasileirão. Então eu uso os dados que o próprio campeonato brasileiro já tem.</a:t>
+            </a:r>
           </a:p>
         </p:txBody>
       </p:sp>
@@ -4110,7 +3863,7 @@
               </a:lnSpc>
               <a:buNone/>
             </a:pPr>
-            <a:fld id="{BEB2A8F8-8528-4AE6-B60A-C9FE462E9210}" type="slidenum">
+            <a:fld id="{798E2C4E-5066-425C-9958-4949521E1B80}" type="slidenum">
               <a:rPr lang="pt-BR" sz="1200" b="0" u="none" strike="noStrike">
                 <a:solidFill>
                   <a:schemeClr val="dk1"/>
@@ -4213,102 +3966,12 @@
               <a:buNone/>
             </a:pPr>
             <a:r>
-              <a:rPr lang="pt-BR" sz="2000" b="0" u="none" strike="noStrike">
-                <a:solidFill>
-                  <a:srgbClr val="000000"/>
-                </a:solidFill>
-                <a:effectLst/>
-                <a:uFillTx/>
-                <a:latin typeface="Arial"/>
-              </a:rPr>
-              <a:t>[Slide 4 de 12 · TENSÃO · tempo previsto 1:10 · ao terminar, o relógio marca 4:35]</a:t>
-            </a:r>
-            <a:br>
-              <a:rPr sz="2000"/>
-            </a:br>
-            <a:br>
-              <a:rPr sz="2000"/>
-            </a:br>
-            <a:r>
-              <a:rPr lang="pt-BR" sz="2000" b="0" u="none" strike="noStrike">
-                <a:solidFill>
-                  <a:srgbClr val="000000"/>
-                </a:solidFill>
-                <a:effectLst/>
-                <a:uFillTx/>
-                <a:latin typeface="Arial"/>
-              </a:rPr>
-              <a:t>Agora começa a parte difícil: a tensão. E o primeiro obstáculo está nos dados.</a:t>
-            </a:r>
-            <a:br>
-              <a:rPr sz="2000"/>
-            </a:br>
-            <a:r>
-              <a:rPr lang="pt-BR" sz="2000" b="0" u="none" strike="noStrike">
-                <a:solidFill>
-                  <a:srgbClr val="000000"/>
-                </a:solidFill>
-                <a:effectLst/>
-                <a:uFillTx/>
-                <a:latin typeface="Arial"/>
-              </a:rPr>
-              <a:t>Uso a PNAD Contínua do IBGE, de 2019 a 2025. Cada domicílio é entrevistado cinco vezes, uma por trimestre — o que permite acompanhar a mesma pessoa ao longo do tempo. O problema é que a pesquisa não tem um número de identificação único para cada pessoa.</a:t>
-            </a:r>
-            <a:br>
-              <a:rPr sz="2000"/>
-            </a:br>
-            <a:r>
-              <a:rPr lang="pt-BR" sz="2000" b="1" u="none" strike="noStrike">
-                <a:solidFill>
-                  <a:srgbClr val="000000"/>
-                </a:solidFill>
-                <a:effectLst/>
-                <a:uFillTx/>
-                <a:latin typeface="Arial"/>
-              </a:rPr>
-              <a:t>Por isso, eu mesmo reconstruí os pares: mesmo domicílio, mesmo sexo, mesma data de aniversário e idade coerente.</a:t>
-            </a:r>
-            <a:br>
-              <a:rPr sz="2000"/>
-            </a:br>
-            <a:r>
-              <a:rPr lang="pt-BR" sz="2000" b="0" u="none" strike="noStrike">
-                <a:solidFill>
-                  <a:srgbClr val="000000"/>
-                </a:solidFill>
-                <a:effectLst/>
-                <a:uFillTx/>
-                <a:latin typeface="Arial"/>
-              </a:rPr>
-              <a:t>O gráfico mostra o tamanho dessa base: quase quatro milhões de pares possíveis, e cerca de 80% encontrado na entrevista seguinte. Cada resultado usa sua própria parte da base, por isso as barras têm tamanhos diferentes.</a:t>
-            </a:r>
-            <a:br>
-              <a:rPr sz="2000"/>
-            </a:br>
-            <a:r>
-              <a:rPr lang="pt-BR" sz="2000" b="0" u="none" strike="noStrike">
-                <a:solidFill>
-                  <a:srgbClr val="000000"/>
-                </a:solidFill>
-                <a:effectLst/>
-                <a:uFillTx/>
-                <a:latin typeface="Arial"/>
-              </a:rPr>
-              <a:t>Um detalhe importante: eu conto transições, não pessoas — a mesma pessoa pode aparecer até quatro vezes.</a:t>
-            </a:r>
-            <a:br>
-              <a:rPr sz="2000"/>
-            </a:br>
-            <a:r>
-              <a:rPr lang="pt-BR" sz="2000" b="0" i="1" u="none" strike="noStrike">
-                <a:solidFill>
-                  <a:schemeClr val="accent6"/>
-                </a:solidFill>
-                <a:effectLst/>
-                <a:uFillTx/>
-                <a:latin typeface="Arial"/>
-              </a:rPr>
-              <a:t>Analogia opcional (avalie se quer usar): é como reconhecer um lutador em um jogo de luta só pelas características dele — altura, golpe especial, estilo de luta — mesmo sem o nome aparecer na tela. Eu faço o mesmo com as pessoas na pesquisa: uso pistas como domicílio, sexo e data de nascimento pra saber que é a mesma pessoa, mesmo sem um número de identificação.</a:t>
+              <a:rPr b="1">
+                <a:solidFill>
+                  <a:srgbClr val="7F7F7F"/>
+                </a:solidFill>
+              </a:rPr>
+              <a:t>[Slide 4 de 12 · TENSÃO · tempo previsto 1:05 · ao terminar, o relógio marca 4:35]</a:t>
             </a:r>
             <a:endParaRPr lang="pt-BR" sz="2000" b="0" u="none" strike="noStrike">
               <a:solidFill>
@@ -4318,6 +3981,58 @@
               <a:uFillTx/>
               <a:latin typeface="Arial"/>
             </a:endParaRPr>
+          </a:p>
+          <a:p/>
+          <a:p>
+            <a:r>
+              <a:t>Agora começa a tensão, e o primeiro obstáculo está nos dados.</a:t>
+            </a:r>
+          </a:p>
+          <a:p/>
+          <a:p>
+            <a:r>
+              <a:t>Uso a PNAD Contínua do IBGE, de 2019 a 2025. Cada domicílio é entrevistado cinco vezes, uma por trimestre, o que permite acompanhar a mesma pessoa. O problema é que a pesquisa não tem um número de identificação confiável para cada pessoa. Então eu reconstruí os pares: mesmo domicílio, mesmo sexo, mesma data de aniversário e idade coerente.</a:t>
+            </a:r>
+          </a:p>
+          <a:p/>
+          <a:p>
+            <a:r>
+              <a:rPr i="1" b="1">
+                <a:solidFill>
+                  <a:srgbClr val="7F7F7F"/>
+                </a:solidFill>
+              </a:rPr>
+              <a:t>[Aponte para o gráfico.]</a:t>
+            </a:r>
+            <a:r>
+              <a:t> São quase quatro milhões de pares possíveis, e cerca de 80% encontram a entrevista seguinte. Cada resultado usa a sua parte da base, por isso as barras têm tamanhos diferentes.</a:t>
+            </a:r>
+          </a:p>
+          <a:p/>
+          <a:p>
+            <a:r>
+              <a:t>Um detalhe: eu conto transições, não pessoas. A mesma pessoa pode aparecer até quatro vezes.</a:t>
+            </a:r>
+          </a:p>
+          <a:p/>
+          <a:p/>
+          <a:p>
+            <a:r>
+              <a:rPr b="1">
+                <a:solidFill>
+                  <a:srgbClr val="C55A11"/>
+                </a:solidFill>
+              </a:rPr>
+              <a:t>ANALOGIA OPCIONAL: </a:t>
+            </a:r>
+            <a:r>
+              <a:rPr i="1">
+                <a:solidFill>
+                  <a:srgbClr val="C55A11"/>
+                </a:solidFill>
+              </a:rPr>
+              <a:t>É como reconhecer um lutador sem o nome na tela, só pelas características: altura, golpe especial, estilo de luta. Eu faço o mesmo com as pistas de domicílio, sexo e data de nascimento.</a:t>
+            </a:r>
           </a:p>
         </p:txBody>
       </p:sp>
@@ -4372,7 +4087,7 @@
               </a:lnSpc>
               <a:buNone/>
             </a:pPr>
-            <a:fld id="{1DE3A906-FD29-4E50-92FE-871950F2DB02}" type="slidenum">
+            <a:fld id="{BED77DDD-9615-4ED1-B9C0-A248F7FB3049}" type="slidenum">
               <a:rPr lang="pt-BR" sz="1200" b="0" u="none" strike="noStrike">
                 <a:solidFill>
                   <a:schemeClr val="dk1"/>
@@ -4475,99 +4190,12 @@
               <a:buNone/>
             </a:pPr>
             <a:r>
-              <a:rPr lang="pt-BR" sz="2000" b="0" u="none" strike="noStrike">
-                <a:solidFill>
-                  <a:srgbClr val="000000"/>
-                </a:solidFill>
-                <a:effectLst/>
-                <a:uFillTx/>
-                <a:latin typeface="Arial"/>
-              </a:rPr>
-              <a:t>[Slide 5 de 12 · TENSÃO · tempo previsto 1:20 · ao terminar, o relógio marca 5:55]</a:t>
-            </a:r>
-            <a:br>
-              <a:rPr sz="2000"/>
-            </a:br>
-            <a:br>
-              <a:rPr sz="2000"/>
-            </a:br>
-            <a:r>
-              <a:rPr lang="pt-BR" sz="2000" b="0" u="none" strike="noStrike">
-                <a:solidFill>
-                  <a:srgbClr val="000000"/>
-                </a:solidFill>
-                <a:effectLst/>
-                <a:uFillTx/>
-                <a:latin typeface="Arial"/>
-              </a:rPr>
-              <a:t>O segundo obstáculo é a medida. O índice de exposição foi feito para ocupações dos Estados Unidos, mas a PNAD usa a classificação brasileira.</a:t>
-            </a:r>
-            <a:br>
-              <a:rPr sz="2000"/>
-            </a:br>
-            <a:r>
-              <a:rPr lang="pt-BR" sz="2000" b="1" u="none" strike="noStrike">
-                <a:solidFill>
-                  <a:srgbClr val="000000"/>
-                </a:solidFill>
-                <a:effectLst/>
-                <a:uFillTx/>
-                <a:latin typeface="Arial"/>
-              </a:rPr>
-              <a:t>Por isso, construí uma ponte em duas etapas: da classificação brasileira para a internacional, e da internacional para a americana.</a:t>
-            </a:r>
-            <a:r>
-              <a:rPr lang="pt-BR" sz="2000" b="0" u="none" strike="noStrike">
-                <a:solidFill>
-                  <a:srgbClr val="000000"/>
-                </a:solidFill>
-                <a:effectLst/>
-                <a:uFillTx/>
-                <a:latin typeface="Arial"/>
-              </a:rPr>
-              <a:t> Quando uma ocupação brasileira equivale a várias americanas, cada uma recebe o mesmo peso .</a:t>
-            </a:r>
-            <a:br>
-              <a:rPr sz="2000"/>
-            </a:br>
-            <a:r>
-              <a:rPr lang="pt-BR" sz="2000" b="0" u="none" strike="noStrike">
-                <a:solidFill>
-                  <a:srgbClr val="000000"/>
-                </a:solidFill>
-                <a:effectLst/>
-                <a:uFillTx/>
-                <a:latin typeface="Arial"/>
-              </a:rPr>
-              <a:t>A cobertura ficou boa: 416 ocupações recebem o índice, e só cerca de 1% da amostra fica de fora. [Aponte para o histograma.] O gráfico mostra que as ocupações se espalham por toda a escala.</a:t>
-            </a:r>
-            <a:br>
-              <a:rPr sz="2000"/>
-            </a:br>
-            <a:r>
-              <a:rPr lang="pt-BR" sz="2000" b="0" u="none" strike="noStrike">
-                <a:solidFill>
-                  <a:srgbClr val="000000"/>
-                </a:solidFill>
-                <a:effectLst/>
-                <a:uFillTx/>
-                <a:latin typeface="Arial"/>
-              </a:rPr>
-              <a:t>E há um terceiro obstáculo: as ocupações mais expostas à IA também são as que mais podem ser feitas de casa — a correlação é de 0,7. Por isso o teletrabalho entra no modelo, para a IA não levar o crédito pelo que foi efeito da pandemia.</a:t>
-            </a:r>
-            <a:br>
-              <a:rPr sz="2000"/>
-            </a:br>
-            <a:r>
-              <a:rPr lang="pt-BR" sz="2000" b="0" i="1" u="none" strike="noStrike">
-                <a:solidFill>
-                  <a:schemeClr val="accent6"/>
-                </a:solidFill>
-                <a:effectLst/>
-                <a:uFillTx/>
-                <a:latin typeface="Arial"/>
-              </a:rPr>
-              <a:t>Analogia opcional (avalie se quer usar): é como traduzir os nomes de personagens de um jogo americano para a versão brasileira — a tradução é boa, mas nunca é 100% perfeita.</a:t>
+              <a:rPr b="1">
+                <a:solidFill>
+                  <a:srgbClr val="7F7F7F"/>
+                </a:solidFill>
+              </a:rPr>
+              <a:t>[Slide 5 de 12 · TENSÃO · tempo previsto 1:15 · ao terminar, o relógio marca 5:50]</a:t>
             </a:r>
             <a:endParaRPr lang="pt-BR" sz="2000" b="0" u="none" strike="noStrike">
               <a:solidFill>
@@ -4577,6 +4205,55 @@
               <a:uFillTx/>
               <a:latin typeface="Arial"/>
             </a:endParaRPr>
+          </a:p>
+          <a:p/>
+          <a:p>
+            <a:r>
+              <a:t>O segundo obstáculo é a medida. O índice foi feito para as ocupações dos Estados Unidos, e a PNAD usa a classificação brasileira. Então construí uma ponte em duas etapas: da classificação brasileira para a internacional, e dela para a americana. Quando uma ocupação brasileira equivale a várias americanas, cada uma recebe o mesmo peso.</a:t>
+            </a:r>
+          </a:p>
+          <a:p/>
+          <a:p>
+            <a:r>
+              <a:t>A cobertura ficou boa: 416 ocupações recebem o índice, e só cerca de 1% da amostra fica de fora. </a:t>
+            </a:r>
+            <a:r>
+              <a:rPr i="1" b="1">
+                <a:solidFill>
+                  <a:srgbClr val="7F7F7F"/>
+                </a:solidFill>
+              </a:rPr>
+              <a:t>[Aponte para o histograma.]</a:t>
+            </a:r>
+            <a:r>
+              <a:t> As ocupações se espalham por toda a escala.</a:t>
+            </a:r>
+          </a:p>
+          <a:p/>
+          <a:p>
+            <a:r>
+              <a:t>E há outro obstáculo: as ocupações mais expostas à IA também são as que mais podem ser feitas de casa. A correlação é de 0,7. Por isso o teletrabalho entra no modelo, para a IA não levar o crédito pelo que foi efeito da pandemia.</a:t>
+            </a:r>
+          </a:p>
+          <a:p/>
+          <a:p/>
+          <a:p>
+            <a:r>
+              <a:rPr b="1">
+                <a:solidFill>
+                  <a:srgbClr val="C55A11"/>
+                </a:solidFill>
+              </a:rPr>
+              <a:t>ANALOGIA OPCIONAL: </a:t>
+            </a:r>
+            <a:r>
+              <a:rPr i="1">
+                <a:solidFill>
+                  <a:srgbClr val="C55A11"/>
+                </a:solidFill>
+              </a:rPr>
+              <a:t>É como traduzir os nomes dos personagens de um jogo americano para a versão brasileira: a tradução é boa, mas nunca é cem por cento perfeita.</a:t>
+            </a:r>
           </a:p>
         </p:txBody>
       </p:sp>
@@ -4631,7 +4308,7 @@
               </a:lnSpc>
               <a:buNone/>
             </a:pPr>
-            <a:fld id="{7A7F4D15-7BF2-45A0-A766-A14664AF77B9}" type="slidenum">
+            <a:fld id="{BA78633D-66A8-4723-85F4-F781191298E3}" type="slidenum">
               <a:rPr lang="pt-BR" sz="1200" b="0" u="none" strike="noStrike">
                 <a:solidFill>
                   <a:schemeClr val="dk1"/>
@@ -4734,163 +4411,71 @@
               <a:buNone/>
             </a:pPr>
             <a:r>
-              <a:rPr lang="pt-BR" sz="2000" b="0" u="none" strike="noStrike">
-                <a:solidFill>
-                  <a:srgbClr val="000000"/>
-                </a:solidFill>
-                <a:effectLst/>
-                <a:uFillTx/>
-                <a:latin typeface="Arial"/>
-              </a:rPr>
-              <a:t>[Slide 6 de 12 · TENSÃO · tempo previsto 1:00 · ao terminar, o relógio marca 6:55]</a:t>
-            </a:r>
-            <a:br>
-              <a:rPr sz="2000"/>
-            </a:br>
-            <a:br>
-              <a:rPr sz="2000"/>
-            </a:br>
-            <a:r>
-              <a:rPr lang="pt-BR" sz="2000" b="0" u="none" strike="noStrike">
-                <a:solidFill>
-                  <a:srgbClr val="000000"/>
-                </a:solidFill>
-                <a:effectLst/>
-                <a:uFillTx/>
-                <a:latin typeface="Arial"/>
-              </a:rPr>
-              <a:t>Para saber se o trabalho mudou, eu olho para sete resultados, divididos em três grupos.</a:t>
-            </a:r>
-            <a:br>
-              <a:rPr sz="2000"/>
-            </a:br>
-            <a:r>
-              <a:rPr lang="pt-BR" sz="2000" b="0" u="none" strike="noStrike">
-                <a:solidFill>
-                  <a:srgbClr val="000000"/>
-                </a:solidFill>
-                <a:effectLst/>
-                <a:uFillTx/>
-                <a:latin typeface="Arial"/>
-              </a:rPr>
-              <a:t>O primeiro é o vínculo: a pessoa saiu do emprego?</a:t>
-            </a:r>
-            <a:r>
-              <a:rPr lang="pt-BR" sz="2000" b="0" i="1" u="none" strike="noStrike">
-                <a:solidFill>
-                  <a:schemeClr val="accent6"/>
-                </a:solidFill>
-                <a:effectLst/>
-                <a:uFillTx/>
-                <a:latin typeface="Arial"/>
-              </a:rPr>
-              <a:t> (analogia opcional: tipo um jogador que saiu do time)</a:t>
-            </a:r>
-            <a:r>
-              <a:rPr lang="pt-BR" sz="2000" b="0" u="none" strike="noStrike">
-                <a:solidFill>
-                  <a:srgbClr val="000000"/>
-                </a:solidFill>
-                <a:effectLst/>
-                <a:uFillTx/>
-                <a:latin typeface="Arial"/>
-              </a:rPr>
-              <a:t> Foi do formal para o informal?</a:t>
-            </a:r>
-            <a:r>
-              <a:rPr lang="pt-BR" sz="2000" b="0" i="1" u="none" strike="noStrike">
-                <a:solidFill>
-                  <a:schemeClr val="accent6"/>
-                </a:solidFill>
-                <a:effectLst/>
-                <a:uFillTx/>
-                <a:latin typeface="Arial"/>
-              </a:rPr>
-              <a:t> (foi pro banco de reservas?)</a:t>
-            </a:r>
-            <a:r>
-              <a:rPr lang="pt-BR" sz="2000" b="0" u="none" strike="noStrike">
-                <a:solidFill>
-                  <a:srgbClr val="000000"/>
-                </a:solidFill>
-                <a:effectLst/>
-                <a:uFillTx/>
-                <a:latin typeface="Arial"/>
-              </a:rPr>
-              <a:t> E, só para conferir: essa mesma pessoa apareceu de novo na entrevista seguinte?</a:t>
-            </a:r>
-            <a:br>
-              <a:rPr sz="2000"/>
-            </a:br>
-            <a:r>
-              <a:rPr lang="pt-BR" sz="2000" b="0" u="none" strike="noStrike">
-                <a:solidFill>
-                  <a:srgbClr val="000000"/>
-                </a:solidFill>
-                <a:effectLst/>
-                <a:uFillTx/>
-                <a:latin typeface="Arial"/>
-              </a:rPr>
+              <a:rPr b="1">
+                <a:solidFill>
+                  <a:srgbClr val="7F7F7F"/>
+                </a:solidFill>
+              </a:rPr>
+              <a:t>[Slide 6 de 12 · TENSÃO · tempo previsto 1:05 · ao terminar, o relógio marca 6:55]</a:t>
+            </a:r>
+            <a:endParaRPr lang="pt-BR" sz="2000" b="0" u="none" strike="noStrike">
+              <a:solidFill>
+                <a:srgbClr val="000000"/>
+              </a:solidFill>
+              <a:effectLst/>
+              <a:uFillTx/>
+              <a:latin typeface="Arial"/>
+            </a:endParaRPr>
+          </a:p>
+          <a:p/>
+          <a:p>
+            <a:r>
+              <a:t>Para saber se o trabalho mudou, olho para sete resultados, em três grupos.</a:t>
+            </a:r>
+          </a:p>
+          <a:p/>
+          <a:p>
+            <a:r>
+              <a:t>O primeiro é o vínculo: a pessoa saiu do emprego? Foi do formal para o informal? E, para conferir, ela apareceu de novo na entrevista seguinte?</a:t>
+            </a:r>
+          </a:p>
+          <a:p/>
+          <a:p>
+            <a:r>
               <a:t>O segundo é a mobilidade: a pessoa mudou de ocupação?</a:t>
             </a:r>
-            <a:r>
-              <a:rPr lang="pt-BR" sz="2000" b="0" i="1" u="none" strike="noStrike">
-                <a:solidFill>
-                  <a:schemeClr val="accent6"/>
-                </a:solidFill>
-                <a:effectLst/>
-                <a:uFillTx/>
-                <a:latin typeface="Arial"/>
-              </a:rPr>
-              <a:t> (trocou de posição em campo?)</a:t>
-            </a:r>
-            <a:br>
-              <a:rPr sz="2000"/>
-            </a:br>
-            <a:r>
-              <a:rPr lang="pt-BR" sz="2000" b="0" u="none" strike="noStrike">
-                <a:solidFill>
-                  <a:srgbClr val="000000"/>
-                </a:solidFill>
-                <a:effectLst/>
-                <a:uFillTx/>
-                <a:latin typeface="Arial"/>
-              </a:rPr>
-              <a:t>O terceiro é a direção: ela foi para uma ocupação menos exposta à IA, ou para uma mais exposta?</a:t>
-            </a:r>
-            <a:r>
-              <a:rPr lang="pt-BR" sz="2000" b="0" i="1" u="none" strike="noStrike">
-                <a:solidFill>
-                  <a:schemeClr val="accent6"/>
-                </a:solidFill>
-                <a:effectLst/>
-                <a:uFillTx/>
-                <a:latin typeface="Arial"/>
-              </a:rPr>
-              <a:t> (foi pra uma posição mais fácil ou mais difícil no time?)</a:t>
-            </a:r>
-            <a:br>
-              <a:rPr sz="2000"/>
-            </a:br>
-            <a:r>
-              <a:rPr lang="pt-BR" sz="2000" b="0" u="none" strike="noStrike">
-                <a:solidFill>
-                  <a:srgbClr val="000000"/>
-                </a:solidFill>
-                <a:effectLst/>
-                <a:uFillTx/>
-                <a:latin typeface="Arial"/>
-              </a:rPr>
-              <a:t>Duas regras aqui. Primeira regra: quando eu não sei para onde a pessoa foi, eu simplesmente não conto esse caso — nunca assumo que ela ficou parada. Segunda regra: as duas direções sempre precisam ser lidas juntas, porque quem já está no topo da exposição tem menos espaço pra subir e mais espaço pra descer, como estar no nível máximo de um jogo: só dá pra ir pra baixo.</a:t>
-            </a:r>
-            <a:endParaRPr lang="pt-BR" sz="2000" b="0" u="none" strike="noStrike">
-              <a:solidFill>
-                <a:srgbClr val="000000"/>
-              </a:solidFill>
-              <a:effectLst/>
-              <a:uFillTx/>
-              <a:latin typeface="Arial"/>
-            </a:endParaRPr>
+          </a:p>
+          <a:p/>
+          <a:p>
+            <a:r>
+              <a:t>O terceiro é a direção: foi para uma ocupação menos exposta à IA, ou para uma mais exposta?</a:t>
+            </a:r>
+          </a:p>
+          <a:p/>
+          <a:p>
+            <a:r>
+              <a:t>Duas regras. Quando não sei para onde a pessoa foi, não conto esse caso: nunca assumo que ela ficou parada. E as duas direções se leem juntas, porque quem já está no topo da exposição tem mais espaço para descer do que para subir.</a:t>
+            </a:r>
+          </a:p>
+          <a:p/>
+          <a:p/>
+          <a:p>
+            <a:r>
+              <a:rPr b="1">
+                <a:solidFill>
+                  <a:srgbClr val="C55A11"/>
+                </a:solidFill>
+              </a:rPr>
+              <a:t>ANALOGIA OPCIONAL: </a:t>
+            </a:r>
+            <a:r>
+              <a:rPr i="1">
+                <a:solidFill>
+                  <a:srgbClr val="C55A11"/>
+                </a:solidFill>
+              </a:rPr>
+              <a:t>Pense num time: o vínculo é se o jogador saiu do time ou foi para o banco; a mobilidade é se trocou de posição; a direção é se foi para uma posição mais ou menos exposta.</a:t>
+            </a:r>
           </a:p>
         </p:txBody>
       </p:sp>
@@ -4945,7 +4530,7 @@
               </a:lnSpc>
               <a:buNone/>
             </a:pPr>
-            <a:fld id="{5D85F966-86BC-4D26-B82E-0CA0166F23F5}" type="slidenum">
+            <a:fld id="{CB95BD0F-3388-4F45-9054-3DA7F551437C}" type="slidenum">
               <a:rPr lang="pt-BR" sz="1200" b="0" u="none" strike="noStrike">
                 <a:solidFill>
                   <a:schemeClr val="dk1"/>
@@ -5048,100 +4633,13 @@
               <a:buNone/>
             </a:pPr>
             <a:r>
-              <a:rPr lang="pt-BR" sz="2000" b="0" u="none" strike="noStrike">
-                <a:solidFill>
-                  <a:srgbClr val="000000"/>
-                </a:solidFill>
-                <a:effectLst/>
-                <a:uFillTx/>
-                <a:latin typeface="Arial"/>
+              <a:rPr b="1">
+                <a:solidFill>
+                  <a:srgbClr val="7F7F7F"/>
+                </a:solidFill>
               </a:rPr>
               <a:t>[Slide 7 de 12 · TENSÃO · tempo previsto 1:20 · ao terminar, o relógio marca 8:15]</a:t>
             </a:r>
-            <a:br>
-              <a:rPr sz="2000"/>
-            </a:br>
-            <a:br>
-              <a:rPr sz="2000"/>
-            </a:br>
-            <a:r>
-              <a:rPr lang="pt-BR" sz="2000" b="0" u="none" strike="noStrike">
-                <a:solidFill>
-                  <a:srgbClr val="000000"/>
-                </a:solidFill>
-                <a:effectLst/>
-                <a:uFillTx/>
-                <a:latin typeface="Arial"/>
-              </a:rPr>
-              <a:t>O último obstáculo é o desenho do estudo. Não existe um grupo que recebeu a IA e outro que não recebeu — o ChatGPT chegou para todo mundo no mesmo dia. O que muda é a intensidade: algumas ocupações são mais expostas que outras.</a:t>
-            </a:r>
-            <a:br>
-              <a:rPr sz="2000"/>
-            </a:br>
-            <a:r>
-              <a:rPr lang="pt-BR" sz="2000" b="1" u="none" strike="noStrike">
-                <a:solidFill>
-                  <a:srgbClr val="000000"/>
-                </a:solidFill>
-                <a:effectLst/>
-                <a:uFillTx/>
-                <a:latin typeface="Arial"/>
-              </a:rPr>
-              <a:t>Por isso, uso o método de diferenças em diferenças com tratamento contínuo. Em palavras simples: comparo o antes e o depois do marco, e pergunto se essa mudança foi maior nas ocupações mais expostas.</a:t>
-            </a:r>
-            <a:r>
-              <a:rPr lang="pt-BR" sz="2000" b="0" u="none" strike="noStrike">
-                <a:solidFill>
-                  <a:srgbClr val="000000"/>
-                </a:solidFill>
-                <a:effectLst/>
-                <a:uFillTx/>
-                <a:latin typeface="Arial"/>
-              </a:rPr>
-              <a:t> O antes tem quinze trimestres, o depois tem doze.</a:t>
-            </a:r>
-            <a:br>
-              <a:rPr sz="2000"/>
-            </a:br>
-            <a:r>
-              <a:rPr lang="pt-BR" sz="2000" b="0" u="none" strike="noStrike">
-                <a:solidFill>
-                  <a:srgbClr val="000000"/>
-                </a:solidFill>
-                <a:effectLst/>
-                <a:uFillTx/>
-                <a:latin typeface="Arial"/>
-              </a:rPr>
-              <a:t>O número que mais importa é o beta, em destaque na equação: ele mostra quantos pontos percentuais a mais cada resultado mudou, para cada unidade a mais de exposição.</a:t>
-            </a:r>
-            <a:br>
-              <a:rPr sz="2000"/>
-            </a:br>
-            <a:r>
-              <a:rPr lang="pt-BR" sz="2000" b="0" u="none" strike="noStrike">
-                <a:solidFill>
-                  <a:srgbClr val="000000"/>
-                </a:solidFill>
-                <a:effectLst/>
-                <a:uFillTx/>
-                <a:latin typeface="Arial"/>
-              </a:rPr>
-              <a:t>O modelo também considera teletrabalho, idade, ocupação de origem, o estado em cada trimestre, e características como sexo, escolaridade e setor. Os erros são calculados por área de coleta, em mais de 30 mil grupos.</a:t>
-            </a:r>
-            <a:br>
-              <a:rPr sz="2000"/>
-            </a:br>
-            <a:r>
-              <a:rPr lang="pt-BR" sz="2000" b="0" i="1" u="none" strike="noStrike">
-                <a:solidFill>
-                  <a:schemeClr val="accent6"/>
-                </a:solidFill>
-                <a:effectLst/>
-                <a:uFillTx/>
-                <a:latin typeface="Arial"/>
-              </a:rPr>
-              <a:t>Analogia opcional (avalie se quer usar): pensa num atacante no Tigrinho Palmeiras ou Pedro do Flamengo — quanto mais perto da área ele recebe a bola, mais chance ele tem de fazer gol. O beta funciona assim: mostra quantos pontos a mais cada unidade extra de exposição à IA soma no resultado. Mas, sozinho, ele não garante o placar final — só mostra essa tendência.</a:t>
-            </a:r>
             <a:endParaRPr lang="pt-BR" sz="2000" b="0" u="none" strike="noStrike">
               <a:solidFill>
                 <a:srgbClr val="000000"/>
@@ -5150,6 +4648,50 @@
               <a:uFillTx/>
               <a:latin typeface="Arial"/>
             </a:endParaRPr>
+          </a:p>
+          <a:p/>
+          <a:p>
+            <a:r>
+              <a:t>O último obstáculo é o desenho do estudo. Não existe um grupo que recebeu a IA e outro que não recebeu: o ChatGPT chegou para todos no mesmo dia. O que muda é a intensidade.</a:t>
+            </a:r>
+          </a:p>
+          <a:p/>
+          <a:p>
+            <a:r>
+              <a:t>Por isso uso diferenças em diferenças com tratamento contínuo. Em palavras simples: comparo o antes e o depois do marco e pergunto se a mudança foi maior nas ocupações mais expostas. O antes tem quinze trimestres; o depois, doze.</a:t>
+            </a:r>
+          </a:p>
+          <a:p/>
+          <a:p>
+            <a:r>
+              <a:t>O número que mais importa é o beta, em destaque na equação: quantos pontos percentuais a mais cada resultado mudou, para cada unidade a mais de exposição.</a:t>
+            </a:r>
+          </a:p>
+          <a:p/>
+          <a:p>
+            <a:r>
+              <a:t>O modelo também leva em conta teletrabalho, idade, ocupação de origem, estado e trimestre, sexo, escolaridade e setor. E os erros são calculados por área de coleta, em mais de 30 mil grupos.</a:t>
+            </a:r>
+          </a:p>
+          <a:p/>
+          <a:p/>
+          <a:p>
+            <a:r>
+              <a:rPr b="1">
+                <a:solidFill>
+                  <a:srgbClr val="C55A11"/>
+                </a:solidFill>
+              </a:rPr>
+              <a:t>ANALOGIA OPCIONAL: </a:t>
+            </a:r>
+            <a:r>
+              <a:rPr i="1">
+                <a:solidFill>
+                  <a:srgbClr val="C55A11"/>
+                </a:solidFill>
+              </a:rPr>
+              <a:t>Lembra do patch de Street Fighter? O beta mede quanto a mais o personagem mais exposto sentiu a mesma atualização.</a:t>
+            </a:r>
           </a:p>
         </p:txBody>
       </p:sp>
@@ -5204,7 +4746,7 @@
               </a:lnSpc>
               <a:buNone/>
             </a:pPr>
-            <a:fld id="{423F9A02-0889-44FC-A9E7-5BE7117A997A}" type="slidenum">
+            <a:fld id="{A705943E-0051-4092-858B-2CAE0E66B386}" type="slidenum">
               <a:rPr lang="pt-BR" sz="1200" b="0" u="none" strike="noStrike">
                 <a:solidFill>
                   <a:schemeClr val="dk1"/>
@@ -5307,127 +4849,81 @@
               <a:buNone/>
             </a:pPr>
             <a:r>
-              <a:rPr lang="pt-BR" sz="2000" b="0" u="none" strike="noStrike">
-                <a:solidFill>
-                  <a:srgbClr val="000000"/>
-                </a:solidFill>
-                <a:effectLst/>
-                <a:uFillTx/>
-                <a:latin typeface="Arial"/>
-              </a:rPr>
-              <a:t>[Slide 8 de 12 · TENSÃO · tempo previsto 1:15 · ao terminar, o relógio marca 9:30]</a:t>
-            </a:r>
-            <a:br>
-              <a:rPr sz="2000"/>
-            </a:br>
-            <a:br>
-              <a:rPr sz="2000"/>
-            </a:br>
-            <a:r>
-              <a:rPr lang="pt-BR" sz="2000" b="0" u="none" strike="noStrike">
-                <a:solidFill>
-                  <a:srgbClr val="000000"/>
-                </a:solidFill>
-                <a:effectLst/>
-                <a:uFillTx/>
-                <a:latin typeface="Arial"/>
-              </a:rPr>
+              <a:rPr b="1">
+                <a:solidFill>
+                  <a:srgbClr val="7F7F7F"/>
+                </a:solidFill>
+              </a:rPr>
+              <a:t>[Slide 8 de 12 · TENSÃO · tempo previsto 1:10 · ao terminar, o relógio marca 9:25]</a:t>
+            </a:r>
+            <a:endParaRPr lang="pt-BR" sz="2000" b="0" u="none" strike="noStrike">
+              <a:solidFill>
+                <a:srgbClr val="000000"/>
+              </a:solidFill>
+              <a:effectLst/>
+              <a:uFillTx/>
+              <a:latin typeface="Arial"/>
+            </a:endParaRPr>
+          </a:p>
+          <a:p/>
+          <a:p>
+            <a:r>
               <a:t>Antes de qualquer modelo, vamos olhar os dados brutos. E aqui a tensão aumenta.</a:t>
             </a:r>
-            <a:br>
-              <a:rPr sz="2000"/>
-            </a:br>
-            <a:r>
-              <a:rPr lang="pt-BR" sz="2000" b="0" u="none" strike="noStrike">
-                <a:solidFill>
-                  <a:srgbClr val="000000"/>
-                </a:solidFill>
-                <a:effectLst/>
-                <a:uFillTx/>
-                <a:latin typeface="Arial"/>
-              </a:rPr>
-              <a:t>[Aponte para o gráfico de barras deitadas.] Essas são as médias antes e depois do marco. </a:t>
-            </a:r>
-            <a:r>
-              <a:rPr lang="pt-BR" sz="2000" b="1" u="none" strike="noStrike">
-                <a:solidFill>
-                  <a:srgbClr val="000000"/>
-                </a:solidFill>
-                <a:effectLst/>
-                <a:uFillTx/>
-                <a:latin typeface="Arial"/>
-              </a:rPr>
-              <a:t>Mudar de ocupação ficou bem mais comum: saltou de cerca de 24% para 32%.</a:t>
-            </a:r>
-            <a:r>
-              <a:rPr lang="pt-BR" sz="2000" b="0" u="none" strike="noStrike">
-                <a:solidFill>
-                  <a:srgbClr val="000000"/>
-                </a:solidFill>
-                <a:effectLst/>
-                <a:uFillTx/>
-                <a:latin typeface="Arial"/>
-              </a:rPr>
-              <a:t> Ir para uma ocupação menos exposta subiu, mas ir para uma mais exposta subiu quase na mesma medida. A passagem do formal para o informal também subiu. Só a saída do emprego ficou praticamente parada.</a:t>
-            </a:r>
-            <a:br>
-              <a:rPr sz="2000"/>
-            </a:br>
-            <a:r>
-              <a:rPr lang="pt-BR" sz="2000" b="0" u="none" strike="noStrike">
-                <a:solidFill>
-                  <a:srgbClr val="000000"/>
-                </a:solidFill>
-                <a:effectLst/>
-                <a:uFillTx/>
-                <a:latin typeface="Arial"/>
-              </a:rPr>
-              <a:t>[Aponte para o gráfico das cinco faixas, Q1 a Q5.] Agora vamos olhar as cinco faixas de exposição, da menor pra maior. Em todas elas, ficar parado na mesma faixa ficou menos comum.</a:t>
-            </a:r>
-            <a:br>
-              <a:rPr sz="2000"/>
-            </a:br>
-            <a:r>
-              <a:rPr lang="pt-BR" sz="2000" b="1" u="none" strike="noStrike">
-                <a:solidFill>
-                  <a:srgbClr val="000000"/>
-                </a:solidFill>
-                <a:effectLst/>
-                <a:uFillTx/>
-                <a:latin typeface="Arial"/>
-              </a:rPr>
-              <a:t>Ou seja: a mobilidade subiu para todo mundo, não só para quem está mais exposto à IA</a:t>
-            </a:r>
-            <a:r>
-              <a:rPr lang="pt-BR" sz="2000" b="0" i="1" u="none" strike="noStrike">
-                <a:solidFill>
-                  <a:schemeClr val="accent6"/>
-                </a:solidFill>
-                <a:effectLst/>
-                <a:uFillTx/>
-                <a:latin typeface="Arial"/>
-              </a:rPr>
-              <a:t> — é como notar que o time inteiro do Palmeiras correu mais no returno, zagueiro, meio-campo e atacante, não só o artilheiro. Antes de elogiar um jogador específico, o técnico precisa checar se foi uma mudança geral na preparação física.</a:t>
-            </a:r>
-            <a:r>
-              <a:rPr lang="pt-BR" sz="2000" b="0" u="none" strike="noStrike">
-                <a:solidFill>
-                  <a:srgbClr val="000000"/>
-                </a:solidFill>
-                <a:effectLst/>
-                <a:uFillTx/>
-                <a:latin typeface="Arial"/>
-              </a:rPr>
-              <a:t> Essa é a tensão do trabalho: se tudo se mexeu, a IA explica alguma parte desse movimento? É isso que o modelo vai responder.</a:t>
-            </a:r>
-            <a:endParaRPr lang="pt-BR" sz="2000" b="0" u="none" strike="noStrike">
-              <a:solidFill>
-                <a:srgbClr val="000000"/>
-              </a:solidFill>
-              <a:effectLst/>
-              <a:uFillTx/>
-              <a:latin typeface="Arial"/>
-            </a:endParaRPr>
+          </a:p>
+          <a:p/>
+          <a:p>
+            <a:r>
+              <a:rPr i="1" b="1">
+                <a:solidFill>
+                  <a:srgbClr val="7F7F7F"/>
+                </a:solidFill>
+              </a:rPr>
+              <a:t>[Aponte para o gráfico de barras deitadas.]</a:t>
+            </a:r>
+            <a:r>
+              <a:t> Estas são as médias antes e depois do marco. Mudar de ocupação ficou bem mais comum: de cerca de 24% para 32%. Ir para uma ocupação menos exposta subiu, mas ir para uma mais exposta subiu quase igual. A passagem do formal para o informal também subiu. Só a saída do emprego ficou parada.</a:t>
+            </a:r>
+          </a:p>
+          <a:p/>
+          <a:p>
+            <a:r>
+              <a:rPr i="1" b="1">
+                <a:solidFill>
+                  <a:srgbClr val="7F7F7F"/>
+                </a:solidFill>
+              </a:rPr>
+              <a:t>[Aponte para o gráfico das cinco faixas, Q1 a Q5.]</a:t>
+            </a:r>
+            <a:r>
+              <a:t> Agora as cinco faixas de exposição. Em todas, ficar na mesma faixa ficou menos comum.</a:t>
+            </a:r>
+          </a:p>
+          <a:p/>
+          <a:p>
+            <a:r>
+              <a:t>Ou seja: a mobilidade subiu para todo mundo, não só para quem está mais exposto. Essa é a tensão do trabalho: se tudo se mexeu, a IA explica alguma parte desse movimento? É isso que o modelo vai responder.</a:t>
+            </a:r>
+          </a:p>
+          <a:p/>
+          <a:p/>
+          <a:p>
+            <a:r>
+              <a:rPr b="1">
+                <a:solidFill>
+                  <a:srgbClr val="C55A11"/>
+                </a:solidFill>
+              </a:rPr>
+              <a:t>ANALOGIA OPCIONAL: </a:t>
+            </a:r>
+            <a:r>
+              <a:rPr i="1">
+                <a:solidFill>
+                  <a:srgbClr val="C55A11"/>
+                </a:solidFill>
+              </a:rPr>
+              <a:t>É como notar que o time inteiro do Palmeiras correu mais no returno, do zagueiro ao atacante. Antes de elogiar um jogador, o técnico precisa checar se mudou a preparação física de todos.</a:t>
+            </a:r>
           </a:p>
         </p:txBody>
       </p:sp>
@@ -5482,7 +4978,7 @@
               </a:lnSpc>
               <a:buNone/>
             </a:pPr>
-            <a:fld id="{C15D6284-0AEE-4E73-958D-98DCBFA7677E}" type="slidenum">
+            <a:fld id="{91CE3BFC-A041-467D-B755-05F79CDEAC88}" type="slidenum">
               <a:rPr lang="pt-BR" sz="1200" b="0" u="none" strike="noStrike">
                 <a:solidFill>
                   <a:schemeClr val="dk1"/>
@@ -5585,105 +5081,84 @@
               <a:buNone/>
             </a:pPr>
             <a:r>
-              <a:rPr lang="pt-BR" sz="2000" b="0" u="none" strike="noStrike">
-                <a:solidFill>
-                  <a:srgbClr val="000000"/>
-                </a:solidFill>
-                <a:effectLst/>
-                <a:uFillTx/>
-                <a:latin typeface="Arial"/>
-              </a:rPr>
-              <a:t>[Slide 9 de 12 · RESOLUÇÃO · tempo previsto 1:30 · ao terminar, o relógio marca 11:00]</a:t>
-            </a:r>
-            <a:br>
-              <a:rPr sz="2000"/>
-            </a:br>
-            <a:br>
-              <a:rPr sz="2000"/>
-            </a:br>
-            <a:r>
-              <a:rPr lang="pt-BR" sz="2000" b="0" u="none" strike="noStrike">
-                <a:solidFill>
-                  <a:srgbClr val="000000"/>
-                </a:solidFill>
-                <a:effectLst/>
-                <a:uFillTx/>
-                <a:latin typeface="Arial"/>
-              </a:rPr>
+              <a:rPr b="1">
+                <a:solidFill>
+                  <a:srgbClr val="7F7F7F"/>
+                </a:solidFill>
+              </a:rPr>
+              <a:t>[Slide 9 de 12 · RESOLUÇÃO · tempo previsto 1:25 · ao terminar, o relógio marca 10:50]</a:t>
+            </a:r>
+            <a:endParaRPr lang="pt-BR" sz="2000" b="0" u="none" strike="noStrike">
+              <a:solidFill>
+                <a:srgbClr val="000000"/>
+              </a:solidFill>
+              <a:effectLst/>
+              <a:uFillTx/>
+              <a:latin typeface="Arial"/>
+            </a:endParaRPr>
+          </a:p>
+          <a:p/>
+          <a:p>
+            <a:r>
               <a:t>E esta é a resposta principal. Cada ponto do gráfico é o beta de um resultado, e a linha ao redor é a margem de erro.</a:t>
             </a:r>
-            <a:r>
-              <a:rPr lang="pt-BR" sz="2000" b="0" i="1" u="none" strike="noStrike">
-                <a:solidFill>
-                  <a:schemeClr val="accent6"/>
-                </a:solidFill>
-                <a:effectLst/>
-                <a:uFillTx/>
-                <a:latin typeface="Arial"/>
-              </a:rPr>
-              <a:t> (analogia opcional: pensa no scouter do Dragon Ball — ele mostra o nível de poder de cada lutador, mas não diz quem vai ganhar a luta, nem por quê. O beta aqui é o scouter: mostra a força da relação, não prova a causa.)</a:t>
-            </a:r>
-            <a:br>
-              <a:rPr sz="2000"/>
-            </a:br>
-            <a:r>
-              <a:rPr lang="pt-BR" sz="2000" b="1" u="none" strike="noStrike">
-                <a:solidFill>
-                  <a:srgbClr val="000000"/>
-                </a:solidFill>
-                <a:effectLst/>
-                <a:uFillTx/>
-                <a:latin typeface="Arial"/>
-              </a:rPr>
-              <a:t>[Aponte para o primeiro ponto do gráfico.] O resultado mais forte é a direção: quanto mais exposta a ocupação de origem, mais as pessoas foram para ocupações menos expostas — um aumento de cerca de 2,2 pontos percentuais para cada unidade a mais de exposição.</a:t>
-            </a:r>
-            <a:r>
-              <a:rPr lang="pt-BR" sz="2000" b="0" u="none" strike="noStrike">
-                <a:solidFill>
-                  <a:srgbClr val="000000"/>
-                </a:solidFill>
-                <a:effectLst/>
-                <a:uFillTx/>
-                <a:latin typeface="Arial"/>
-              </a:rPr>
-              <a:t> Isso equivale a cerca de um oitavo da taxa do período depois do marco. [Aponte para o último ponto do gráfico.] E o caminho contrário, ir para uma ocupação mais exposta, ficou 1,4 ponto menor.</a:t>
-            </a:r>
-            <a:br>
-              <a:rPr sz="2000"/>
-            </a:br>
-            <a:r>
-              <a:rPr lang="pt-BR" sz="2000" b="0" u="none" strike="noStrike">
-                <a:solidFill>
-                  <a:srgbClr val="000000"/>
-                </a:solidFill>
-                <a:effectLst/>
-                <a:uFillTx/>
-                <a:latin typeface="Arial"/>
-              </a:rPr>
-              <a:t>Mudar de ocupação também ficou um pouco mais comum nas ocupações mais expostas, quase um ponto a mais.</a:t>
-            </a:r>
-            <a:br>
-              <a:rPr sz="2000"/>
-            </a:br>
-            <a:r>
-              <a:rPr lang="pt-BR" sz="2000" b="0" u="none" strike="noStrike">
-                <a:solidFill>
-                  <a:srgbClr val="000000"/>
-                </a:solidFill>
-                <a:effectLst/>
-                <a:uFillTx/>
-                <a:latin typeface="Arial"/>
-              </a:rPr>
-              <a:t>Duas ressalvas importantes: parte do resultado de direção é mecânica, porque quem já está no topo tem mais espaço para descer. E são sete testes ao mesmo tempo, sem correção estatística para isso — o resultado mais fraco não deve ser citado sozinho.</a:t>
-            </a:r>
-            <a:endParaRPr lang="pt-BR" sz="2000" b="0" u="none" strike="noStrike">
-              <a:solidFill>
-                <a:srgbClr val="000000"/>
-              </a:solidFill>
-              <a:effectLst/>
-              <a:uFillTx/>
-              <a:latin typeface="Arial"/>
-            </a:endParaRPr>
+          </a:p>
+          <a:p/>
+          <a:p>
+            <a:r>
+              <a:rPr i="1" b="1">
+                <a:solidFill>
+                  <a:srgbClr val="7F7F7F"/>
+                </a:solidFill>
+              </a:rPr>
+              <a:t>[Aponte para o primeiro ponto do gráfico.]</a:t>
+            </a:r>
+            <a:r>
+              <a:t> O resultado mais forte é a direção: quanto mais exposta a ocupação de origem, mais as pessoas foram para ocupações menos expostas. São cerca de 2,2 pontos percentuais a mais por unidade de exposição, perto de um oitavo da taxa depois do marco. </a:t>
+            </a:r>
+            <a:r>
+              <a:rPr i="1" b="1">
+                <a:solidFill>
+                  <a:srgbClr val="7F7F7F"/>
+                </a:solidFill>
+              </a:rPr>
+              <a:t>[Aponte para o último ponto do gráfico.]</a:t>
+            </a:r>
+            <a:r>
+              <a:t> E o caminho contrário, ir para uma ocupação mais exposta, ficou 1,4 ponto menor.</a:t>
+            </a:r>
+          </a:p>
+          <a:p/>
+          <a:p>
+            <a:r>
+              <a:t>Mudar de ocupação também ficou um pouco mais comum nas ocupações mais expostas: quase um ponto a mais.</a:t>
+            </a:r>
+          </a:p>
+          <a:p/>
+          <a:p>
+            <a:r>
+              <a:t>Duas ressalvas. Parte do resultado de direção é mecânica, porque quem está no topo tem mais espaço para descer. E são sete testes ao mesmo tempo, sem correção para isso: o resultado mais fraco não deve ser citado sozinho.</a:t>
+            </a:r>
+          </a:p>
+          <a:p/>
+          <a:p/>
+          <a:p>
+            <a:r>
+              <a:rPr b="1">
+                <a:solidFill>
+                  <a:srgbClr val="C55A11"/>
+                </a:solidFill>
+              </a:rPr>
+              <a:t>ANALOGIA OPCIONAL: </a:t>
+            </a:r>
+            <a:r>
+              <a:rPr i="1">
+                <a:solidFill>
+                  <a:srgbClr val="C55A11"/>
+                </a:solidFill>
+              </a:rPr>
+              <a:t>Pense no scouter do Dragon Ball: ele mostra o nível de poder de cada lutador, mas não diz quem vai ganhar a luta, nem por quê. O beta é o scouter: mostra a força da relação, não prova a causa.</a:t>
+            </a:r>
           </a:p>
         </p:txBody>
       </p:sp>
@@ -5738,7 +5213,7 @@
               </a:lnSpc>
               <a:buNone/>
             </a:pPr>
-            <a:fld id="{9758A835-97E5-46F2-9562-1696F3D5CF08}" type="slidenum">
+            <a:fld id="{75567166-7457-40EE-BB7F-FD8DE762EF19}" type="slidenum">
               <a:rPr lang="pt-BR" sz="1200" b="0" u="none" strike="noStrike">
                 <a:solidFill>
                   <a:schemeClr val="dk1"/>
@@ -6007,7 +5482,7 @@
               </a:lnSpc>
               <a:buNone/>
             </a:pPr>
-            <a:fld id="{FF10317A-9A77-49F3-9D5F-CE303CA3A85C}" type="slidenum">
+            <a:fld id="{8D79A9E1-3AA1-46B4-99A2-632EFEE25F19}" type="slidenum">
               <a:rPr lang="en-US" sz="1000" b="0" u="none" strike="noStrike">
                 <a:solidFill>
                   <a:schemeClr val="accent6"/>
@@ -6825,7 +6300,7 @@
               </a:lnSpc>
               <a:buNone/>
             </a:pPr>
-            <a:fld id="{33AF55A9-A06C-44E4-8071-0476A4FA0BD0}" type="slidenum">
+            <a:fld id="{6E5BA53D-5322-4531-82BB-1C27000D55B5}" type="slidenum">
               <a:rPr lang="en-US" sz="1000" b="0" u="none" strike="noStrike">
                 <a:solidFill>
                   <a:schemeClr val="accent4"/>
@@ -8410,7 +7885,7 @@
               </a:lnSpc>
               <a:buNone/>
             </a:pPr>
-            <a:fld id="{7C3252E0-CDFF-4147-B488-3055FFC804C1}" type="slidenum">
+            <a:fld id="{F07B7548-F9C3-48A8-B0F0-EC34691E3062}" type="slidenum">
               <a:rPr lang="pt-BR" sz="1000" b="0" u="none" strike="noStrike">
                 <a:solidFill>
                   <a:schemeClr val="accent6"/>
@@ -9276,7 +8751,7 @@
               </a:lnSpc>
               <a:buNone/>
             </a:pPr>
-            <a:fld id="{B43119C8-0CF8-43EC-81FF-27693743827C}" type="slidenum">
+            <a:fld id="{44FEDDE2-2B21-4330-AF5D-F6114E1AD3A8}" type="slidenum">
               <a:rPr lang="pt-BR" sz="1000" b="0" u="none" strike="noStrike">
                 <a:solidFill>
                   <a:schemeClr val="accent6"/>
@@ -10857,7 +10332,7 @@
               </a:lnSpc>
               <a:buNone/>
             </a:pPr>
-            <a:fld id="{6E5AC961-D7A1-4395-A701-5C5D95B6007A}" type="slidenum">
+            <a:fld id="{FD6FED65-26FD-4C7B-89C6-59CFFF2119B2}" type="slidenum">
               <a:rPr lang="pt-BR" sz="1000" b="0" u="none" strike="noStrike">
                 <a:solidFill>
                   <a:schemeClr val="accent4"/>
@@ -11935,7 +11410,7 @@
               </a:lnSpc>
               <a:buNone/>
             </a:pPr>
-            <a:fld id="{D2B0F3A4-CA4E-41C0-B26E-3BBEF42F22C4}" type="slidenum">
+            <a:fld id="{F3FA752C-5909-433E-AD90-4541F207CC5E}" type="slidenum">
               <a:rPr lang="pt-BR" sz="1000" b="0" u="none" strike="noStrike">
                 <a:solidFill>
                   <a:schemeClr val="accent6"/>
@@ -13202,7 +12677,7 @@
               </a:lnSpc>
               <a:buNone/>
             </a:pPr>
-            <a:fld id="{0F43877B-C1E8-4465-B038-F598A1EC1502}" type="slidenum">
+            <a:fld id="{77F0BA58-1DC1-4AF0-86E4-0AED958836C3}" type="slidenum">
               <a:rPr lang="pt-BR" sz="1000" b="0" u="none" strike="noStrike">
                 <a:solidFill>
                   <a:schemeClr val="accent6"/>
@@ -14154,7 +13629,7 @@
               </a:lnSpc>
               <a:buNone/>
             </a:pPr>
-            <a:fld id="{72CEBE11-AF5C-48CF-AEF4-FEA6BF0C061F}" type="slidenum">
+            <a:fld id="{D9620D3A-6CFC-4878-8067-8976110A753A}" type="slidenum">
               <a:rPr lang="pt-BR" sz="1000" b="0" u="none" strike="noStrike">
                 <a:solidFill>
                   <a:schemeClr val="accent6"/>
@@ -15664,7 +15139,7 @@
               </a:lnSpc>
               <a:buNone/>
             </a:pPr>
-            <a:fld id="{A00E80D3-AFB6-4320-9B55-F631F926FB39}" type="slidenum">
+            <a:fld id="{A0986D32-973E-445A-9872-8C1E3E4907CF}" type="slidenum">
               <a:rPr lang="pt-BR" sz="1000" b="0" u="none" strike="noStrike">
                 <a:solidFill>
                   <a:schemeClr val="accent6"/>
@@ -17003,7 +16478,7 @@
               </a:lnSpc>
               <a:buNone/>
             </a:pPr>
-            <a:fld id="{572754D4-FD67-4FD9-9C2D-038B25CB4C54}" type="slidenum">
+            <a:fld id="{81A532D8-B75D-4C2E-9BDD-4C583B6D0194}" type="slidenum">
               <a:rPr lang="pt-BR" sz="1000" b="0" u="none" strike="noStrike">
                 <a:solidFill>
                   <a:schemeClr val="accent6"/>
@@ -17943,7 +17418,7 @@
               </a:lnSpc>
               <a:buNone/>
             </a:pPr>
-            <a:fld id="{89E8775C-7E5E-4E9D-83B6-7D5E46750573}" type="slidenum">
+            <a:fld id="{80288C25-5AC6-4AAD-AC88-B0F0A878C193}" type="slidenum">
               <a:rPr lang="pt-BR" sz="1000" b="0" u="none" strike="noStrike">
                 <a:solidFill>
                   <a:schemeClr val="accent6"/>
@@ -18557,7 +18032,7 @@
               </a:lnSpc>
               <a:buNone/>
             </a:pPr>
-            <a:fld id="{528C9A8C-4E35-45C2-AC6A-EB7FBBB5B281}" type="slidenum">
+            <a:fld id="{079790B4-303F-47DA-9EA5-CB5115552ECD}" type="slidenum">
               <a:rPr lang="pt-BR" sz="1000" b="0" u="none" strike="noStrike">
                 <a:solidFill>
                   <a:schemeClr val="accent6"/>
@@ -22589,7 +22064,7 @@
               </a:lnSpc>
               <a:buNone/>
             </a:pPr>
-            <a:fld id="{B84F008F-8AD9-45BE-AD01-3E8D1C2E6889}" type="slidenum">
+            <a:fld id="{D00A953E-EA32-40CB-800D-D846F21F8500}" type="slidenum">
               <a:rPr lang="pt-BR" sz="1000" b="0" u="none" strike="noStrike">
                 <a:solidFill>
                   <a:schemeClr val="accent6"/>

--- a/apresentacao/apresentacao_dissertacao_oficial.pptx
+++ b/apresentacao/apresentacao_dissertacao_oficial.pptx
@@ -2922,26 +2922,6 @@
               <a:t>Por fim, o controle: a chance de reencontrar a pessoa quase variou com a exposição, perto do limite de significância. Não posso descartar que as perdas de entrevista influenciem o resultado.</a:t>
             </a:r>
           </a:p>
-          <a:p/>
-          <a:p/>
-          <a:p>
-            <a:r>
-              <a:rPr b="1">
-                <a:solidFill>
-                  <a:srgbClr val="C55A11"/>
-                </a:solidFill>
-              </a:rPr>
-              <a:t>ANALOGIA OPCIONAL: </a:t>
-            </a:r>
-            <a:r>
-              <a:rPr i="1">
-                <a:solidFill>
-                  <a:srgbClr val="C55A11"/>
-                </a:solidFill>
-              </a:rPr>
-              <a:t>É como esperar que a barra de vida do personagem mais exposto caísse, e ela simplesmente não caiu. É a reviravolta do capítulo.</a:t>
-            </a:r>
-          </a:p>
         </p:txBody>
       </p:sp>
       <p:sp>
@@ -3790,26 +3770,6 @@
               <a:t>E aqui está a lacuna: no Brasil, nenhuma pesquisa grande pergunta quem usa IA no trabalho. Por isso uso o que existe: a exposição da ocupação, numa pesquisa feita nos domicílios.</a:t>
             </a:r>
           </a:p>
-          <a:p/>
-          <a:p/>
-          <a:p>
-            <a:r>
-              <a:rPr b="1">
-                <a:solidFill>
-                  <a:srgbClr val="C55A11"/>
-                </a:solidFill>
-              </a:rPr>
-              <a:t>ANALOGIA OPCIONAL: </a:t>
-            </a:r>
-            <a:r>
-              <a:rPr i="1">
-                <a:solidFill>
-                  <a:srgbClr val="C55A11"/>
-                </a:solidFill>
-              </a:rPr>
-              <a:t>É como ter ótimos relatórios de scout de vários campeonatos, mas nenhum do Brasileirão. Então eu uso os dados que o próprio campeonato brasileiro já tem.</a:t>
-            </a:r>
-          </a:p>
         </p:txBody>
       </p:sp>
       <p:sp>
@@ -4014,26 +3974,6 @@
               <a:t>Um detalhe: eu conto transições, não pessoas. A mesma pessoa pode aparecer até quatro vezes.</a:t>
             </a:r>
           </a:p>
-          <a:p/>
-          <a:p/>
-          <a:p>
-            <a:r>
-              <a:rPr b="1">
-                <a:solidFill>
-                  <a:srgbClr val="C55A11"/>
-                </a:solidFill>
-              </a:rPr>
-              <a:t>ANALOGIA OPCIONAL: </a:t>
-            </a:r>
-            <a:r>
-              <a:rPr i="1">
-                <a:solidFill>
-                  <a:srgbClr val="C55A11"/>
-                </a:solidFill>
-              </a:rPr>
-              <a:t>É como reconhecer um lutador sem o nome na tela, só pelas características: altura, golpe especial, estilo de luta. Eu faço o mesmo com as pistas de domicílio, sexo e data de nascimento.</a:t>
-            </a:r>
-          </a:p>
         </p:txBody>
       </p:sp>
       <p:sp>
@@ -4235,26 +4175,6 @@
               <a:t>E há outro obstáculo: as ocupações mais expostas à IA também são as que mais podem ser feitas de casa. A correlação é de 0,7. Por isso o teletrabalho entra no modelo, para a IA não levar o crédito pelo que foi efeito da pandemia.</a:t>
             </a:r>
           </a:p>
-          <a:p/>
-          <a:p/>
-          <a:p>
-            <a:r>
-              <a:rPr b="1">
-                <a:solidFill>
-                  <a:srgbClr val="C55A11"/>
-                </a:solidFill>
-              </a:rPr>
-              <a:t>ANALOGIA OPCIONAL: </a:t>
-            </a:r>
-            <a:r>
-              <a:rPr i="1">
-                <a:solidFill>
-                  <a:srgbClr val="C55A11"/>
-                </a:solidFill>
-              </a:rPr>
-              <a:t>É como traduzir os nomes dos personagens de um jogo americano para a versão brasileira: a tradução é boa, mas nunca é cem por cento perfeita.</a:t>
-            </a:r>
-          </a:p>
         </p:txBody>
       </p:sp>
       <p:sp>
@@ -4457,26 +4377,6 @@
               <a:t>Duas regras. Quando não sei para onde a pessoa foi, não conto esse caso: nunca assumo que ela ficou parada. E as duas direções se leem juntas, porque quem já está no topo da exposição tem mais espaço para descer do que para subir.</a:t>
             </a:r>
           </a:p>
-          <a:p/>
-          <a:p/>
-          <a:p>
-            <a:r>
-              <a:rPr b="1">
-                <a:solidFill>
-                  <a:srgbClr val="C55A11"/>
-                </a:solidFill>
-              </a:rPr>
-              <a:t>ANALOGIA OPCIONAL: </a:t>
-            </a:r>
-            <a:r>
-              <a:rPr i="1">
-                <a:solidFill>
-                  <a:srgbClr val="C55A11"/>
-                </a:solidFill>
-              </a:rPr>
-              <a:t>Pense num time: o vínculo é se o jogador saiu do time ou foi para o banco; a mobilidade é se trocou de posição; a direção é se foi para uma posição mais ou menos exposta.</a:t>
-            </a:r>
-          </a:p>
         </p:txBody>
       </p:sp>
       <p:sp>
@@ -4673,26 +4573,6 @@
               <a:t>O modelo também leva em conta teletrabalho, idade, ocupação de origem, estado e trimestre, sexo, escolaridade e setor. E os erros são calculados por área de coleta, em mais de 30 mil grupos.</a:t>
             </a:r>
           </a:p>
-          <a:p/>
-          <a:p/>
-          <a:p>
-            <a:r>
-              <a:rPr b="1">
-                <a:solidFill>
-                  <a:srgbClr val="C55A11"/>
-                </a:solidFill>
-              </a:rPr>
-              <a:t>ANALOGIA OPCIONAL: </a:t>
-            </a:r>
-            <a:r>
-              <a:rPr i="1">
-                <a:solidFill>
-                  <a:srgbClr val="C55A11"/>
-                </a:solidFill>
-              </a:rPr>
-              <a:t>Lembra do patch de Street Fighter? O beta mede quanto a mais o personagem mais exposto sentiu a mesma atualização.</a:t>
-            </a:r>
-          </a:p>
         </p:txBody>
       </p:sp>
       <p:sp>
@@ -4903,26 +4783,6 @@
           <a:p>
             <a:r>
               <a:t>Ou seja: a mobilidade subiu para todo mundo, não só para quem está mais exposto. Essa é a tensão do trabalho: se tudo se mexeu, a IA explica alguma parte desse movimento? É isso que o modelo vai responder.</a:t>
-            </a:r>
-          </a:p>
-          <a:p/>
-          <a:p/>
-          <a:p>
-            <a:r>
-              <a:rPr b="1">
-                <a:solidFill>
-                  <a:srgbClr val="C55A11"/>
-                </a:solidFill>
-              </a:rPr>
-              <a:t>ANALOGIA OPCIONAL: </a:t>
-            </a:r>
-            <a:r>
-              <a:rPr i="1">
-                <a:solidFill>
-                  <a:srgbClr val="C55A11"/>
-                </a:solidFill>
-              </a:rPr>
-              <a:t>É como notar que o time inteiro do Palmeiras correu mais no returno, do zagueiro ao atacante. Antes de elogiar um jogador, o técnico precisa checar se mudou a preparação física de todos.</a:t>
             </a:r>
           </a:p>
         </p:txBody>

--- a/apresentacao/apresentacao_dissertacao_oficial.pptx
+++ b/apresentacao/apresentacao_dissertacao_oficial.pptx
@@ -5017,7 +5017,7 @@
                   <a:srgbClr val="C55A11"/>
                 </a:solidFill>
               </a:rPr>
-              <a:t>Pense no scouter do Dragon Ball: ele mostra o nível de poder de cada lutador, mas não diz quem vai ganhar a luta, nem por quê. O beta é o scouter: mostra a força da relação, não prova a causa.</a:t>
+              <a:t>Lembra do rastreador do Vegeta, aquele aparelho no olho que mede o poder de luta? Ele diz que o poder do Goku "é de mais de 8 mil!", mas não diz quem vai ganhar a luta, nem por quê. O beta é esse rastreador: mostra a força da relação, não prova a causa.</a:t>
             </a:r>
           </a:p>
         </p:txBody>
